--- a/Коломієць_Резюме_Презентація.pptx
+++ b/Коломієць_Резюме_Презентація.pptx
@@ -5,7 +5,7 @@
     <p:sldMasterId id="2147483648" r:id="rId1"/>
   </p:sldMasterIdLst>
   <p:notesMasterIdLst>
-    <p:notesMasterId r:id="rId11"/>
+    <p:notesMasterId r:id="rId13"/>
   </p:notesMasterIdLst>
   <p:sldIdLst>
     <p:sldId id="256" r:id="rId2"/>
@@ -17,6 +17,8 @@
     <p:sldId id="262" r:id="rId8"/>
     <p:sldId id="263" r:id="rId9"/>
     <p:sldId id="264" r:id="rId10"/>
+    <p:sldId id="265" r:id="rId11"/>
+    <p:sldId id="266" r:id="rId12"/>
   </p:sldIdLst>
   <p:sldSz cx="9144000" cy="5143500" type="screen16x9"/>
   <p:notesSz cx="5143500" cy="9144000"/>
@@ -145,7 +147,7 @@
     </p:spTree>
     <p:extLst>
       <p:ext uri="{BB962C8B-B14F-4D97-AF65-F5344CB8AC3E}">
-        <p14:creationId xmlns:p14="http://schemas.microsoft.com/office/powerpoint/2010/main" val="4128851152"/>
+        <p14:creationId xmlns:p14="http://schemas.microsoft.com/office/powerpoint/2010/main" val="2356909674"/>
       </p:ext>
     </p:extLst>
   </p:cSld>
@@ -311,6 +313,174 @@
             <a:fld id="{F7021451-1387-4CA6-816F-3879F97B5CBC}" type="slidenum">
               <a:rPr lang="en-US"/>
               <a:t>1</a:t>
+            </a:fld>
+            <a:endParaRPr lang="en-US"/>
+          </a:p>
+        </p:txBody>
+      </p:sp>
+    </p:spTree>
+    <p:extLst>
+      <p:ext uri="{BB962C8B-B14F-4D97-AF65-F5344CB8AC3E}">
+        <p14:creationId xmlns:p14="http://schemas.microsoft.com/office/powerpoint/2010/main" val="1024086991"/>
+      </p:ext>
+    </p:extLst>
+  </p:cSld>
+  <p:clrMapOvr>
+    <a:masterClrMapping/>
+  </p:clrMapOvr>
+</p:notes>
+</file>
+
+<file path=ppt/notesSlides/notesSlide10.xml><?xml version="1.0" encoding="utf-8"?>
+<p:notes xmlns:a="http://schemas.openxmlformats.org/drawingml/2006/main" xmlns:r="http://schemas.openxmlformats.org/officeDocument/2006/relationships" xmlns:p="http://schemas.openxmlformats.org/presentationml/2006/main">
+  <p:cSld>
+    <p:spTree>
+      <p:nvGrpSpPr>
+        <p:cNvPr id="1" name=""/>
+        <p:cNvGrpSpPr/>
+        <p:nvPr/>
+      </p:nvGrpSpPr>
+      <p:grpSpPr>
+        <a:xfrm>
+          <a:off x="0" y="0"/>
+          <a:ext cx="0" cy="0"/>
+          <a:chOff x="0" y="0"/>
+          <a:chExt cx="0" cy="0"/>
+        </a:xfrm>
+      </p:grpSpPr>
+      <p:sp>
+        <p:nvSpPr>
+          <p:cNvPr id="2" name="Slide Image Placeholder 1"/>
+          <p:cNvSpPr>
+            <a:spLocks noGrp="1" noRot="1" noChangeAspect="1"/>
+          </p:cNvSpPr>
+          <p:nvPr>
+            <p:ph type="sldImg"/>
+          </p:nvPr>
+        </p:nvSpPr>
+        <p:spPr/>
+      </p:sp>
+      <p:sp>
+        <p:nvSpPr>
+          <p:cNvPr id="3" name="Notes Placeholder 2"/>
+          <p:cNvSpPr>
+            <a:spLocks noGrp="1"/>
+          </p:cNvSpPr>
+          <p:nvPr>
+            <p:ph type="body" idx="1"/>
+          </p:nvPr>
+        </p:nvSpPr>
+        <p:spPr/>
+        <p:txBody>
+          <a:bodyPr/>
+          <a:lstStyle/>
+          <a:p>
+            <a:endParaRPr lang="en-US" dirty="0"/>
+          </a:p>
+        </p:txBody>
+      </p:sp>
+      <p:sp>
+        <p:nvSpPr>
+          <p:cNvPr id="4" name="Slide Number Placeholder 3"/>
+          <p:cNvSpPr>
+            <a:spLocks noGrp="1"/>
+          </p:cNvSpPr>
+          <p:nvPr>
+            <p:ph type="sldNum" sz="quarter" idx="10"/>
+          </p:nvPr>
+        </p:nvSpPr>
+        <p:spPr/>
+        <p:txBody>
+          <a:bodyPr/>
+          <a:lstStyle/>
+          <a:p>
+            <a:fld id="{F7021451-1387-4CA6-816F-3879F97B5CBC}" type="slidenum">
+              <a:rPr lang="en-US"/>
+              <a:t>10</a:t>
+            </a:fld>
+            <a:endParaRPr lang="en-US"/>
+          </a:p>
+        </p:txBody>
+      </p:sp>
+    </p:spTree>
+    <p:extLst>
+      <p:ext uri="{BB962C8B-B14F-4D97-AF65-F5344CB8AC3E}">
+        <p14:creationId xmlns:p14="http://schemas.microsoft.com/office/powerpoint/2010/main" val="1024086991"/>
+      </p:ext>
+    </p:extLst>
+  </p:cSld>
+  <p:clrMapOvr>
+    <a:masterClrMapping/>
+  </p:clrMapOvr>
+</p:notes>
+</file>
+
+<file path=ppt/notesSlides/notesSlide11.xml><?xml version="1.0" encoding="utf-8"?>
+<p:notes xmlns:a="http://schemas.openxmlformats.org/drawingml/2006/main" xmlns:r="http://schemas.openxmlformats.org/officeDocument/2006/relationships" xmlns:p="http://schemas.openxmlformats.org/presentationml/2006/main">
+  <p:cSld>
+    <p:spTree>
+      <p:nvGrpSpPr>
+        <p:cNvPr id="1" name=""/>
+        <p:cNvGrpSpPr/>
+        <p:nvPr/>
+      </p:nvGrpSpPr>
+      <p:grpSpPr>
+        <a:xfrm>
+          <a:off x="0" y="0"/>
+          <a:ext cx="0" cy="0"/>
+          <a:chOff x="0" y="0"/>
+          <a:chExt cx="0" cy="0"/>
+        </a:xfrm>
+      </p:grpSpPr>
+      <p:sp>
+        <p:nvSpPr>
+          <p:cNvPr id="2" name="Slide Image Placeholder 1"/>
+          <p:cNvSpPr>
+            <a:spLocks noGrp="1" noRot="1" noChangeAspect="1"/>
+          </p:cNvSpPr>
+          <p:nvPr>
+            <p:ph type="sldImg"/>
+          </p:nvPr>
+        </p:nvSpPr>
+        <p:spPr/>
+      </p:sp>
+      <p:sp>
+        <p:nvSpPr>
+          <p:cNvPr id="3" name="Notes Placeholder 2"/>
+          <p:cNvSpPr>
+            <a:spLocks noGrp="1"/>
+          </p:cNvSpPr>
+          <p:nvPr>
+            <p:ph type="body" idx="1"/>
+          </p:nvPr>
+        </p:nvSpPr>
+        <p:spPr/>
+        <p:txBody>
+          <a:bodyPr/>
+          <a:lstStyle/>
+          <a:p>
+            <a:endParaRPr lang="en-US" dirty="0"/>
+          </a:p>
+        </p:txBody>
+      </p:sp>
+      <p:sp>
+        <p:nvSpPr>
+          <p:cNvPr id="4" name="Slide Number Placeholder 3"/>
+          <p:cNvSpPr>
+            <a:spLocks noGrp="1"/>
+          </p:cNvSpPr>
+          <p:nvPr>
+            <p:ph type="sldNum" sz="quarter" idx="10"/>
+          </p:nvPr>
+        </p:nvSpPr>
+        <p:spPr/>
+        <p:txBody>
+          <a:bodyPr/>
+          <a:lstStyle/>
+          <a:p>
+            <a:fld id="{F7021451-1387-4CA6-816F-3879F97B5CBC}" type="slidenum">
+              <a:rPr lang="en-US"/>
+              <a:t>11</a:t>
             </a:fld>
             <a:endParaRPr lang="en-US"/>
           </a:p>
@@ -1513,7 +1683,40 @@
                 <a:ea typeface="Calibri" pitchFamily="34" charset="-122"/>
                 <a:cs typeface="Calibri" pitchFamily="34" charset="-120"/>
               </a:rPr>
-              <a:t>Резюме · Київ · 2026</a:t>
+              <a:t>Резюме · </a:t>
+            </a:r>
+            <a:r>
+              <a:rPr lang="ru-UA" sz="1600" i="1" dirty="0" err="1">
+                <a:solidFill>
+                  <a:srgbClr val="A9AE9D"/>
+                </a:solidFill>
+                <a:latin typeface="Calibri" pitchFamily="34" charset="0"/>
+                <a:ea typeface="Calibri" pitchFamily="34" charset="-122"/>
+                <a:cs typeface="Calibri" pitchFamily="34" charset="-120"/>
+              </a:rPr>
+              <a:t>Презентац</a:t>
+            </a:r>
+            <a:r>
+              <a:rPr lang="uk-UA" sz="1600" i="1" dirty="0" err="1">
+                <a:solidFill>
+                  <a:srgbClr val="A9AE9D"/>
+                </a:solidFill>
+                <a:latin typeface="Calibri" pitchFamily="34" charset="0"/>
+                <a:ea typeface="Calibri" pitchFamily="34" charset="-122"/>
+                <a:cs typeface="Calibri" pitchFamily="34" charset="-120"/>
+              </a:rPr>
+              <a:t>ія</a:t>
+            </a:r>
+            <a:r>
+              <a:rPr lang="en-US" sz="1600" i="1" dirty="0">
+                <a:solidFill>
+                  <a:srgbClr val="A9AE9D"/>
+                </a:solidFill>
+                <a:latin typeface="Calibri" pitchFamily="34" charset="0"/>
+                <a:ea typeface="Calibri" pitchFamily="34" charset="-122"/>
+                <a:cs typeface="Calibri" pitchFamily="34" charset="-120"/>
+              </a:rPr>
+              <a:t> · 2026</a:t>
             </a:r>
             <a:endParaRPr lang="en-US" sz="1600" dirty="0"/>
           </a:p>
@@ -1655,7 +1858,7 @@
         <p:spPr>
           <a:xfrm>
             <a:off x="2944368" y="3749040"/>
-            <a:ext cx="3730752" cy="411480"/>
+            <a:ext cx="3794760" cy="411480"/>
           </a:xfrm>
           <a:prstGeom prst="rect">
             <a:avLst/>
@@ -1667,151 +1870,27 @@
           <a:bodyPr wrap="square" rtlCol="0" anchor="ctr"/>
           <a:lstStyle/>
           <a:p>
+            <a:pPr marL="0" indent="0">
+              <a:buNone/>
+            </a:pPr>
             <a:r>
               <a:rPr lang="en-US" sz="1200" dirty="0">
                 <a:solidFill>
-                  <a:schemeClr val="bg1"/>
-                </a:solidFill>
-                <a:latin typeface="Calibri" pitchFamily="34" charset="0"/>
-                <a:ea typeface="Calibri" pitchFamily="34" charset="-122"/>
-                <a:cs typeface="Calibri" pitchFamily="34" charset="-120"/>
-              </a:rPr>
-              <a:t>romankolomiets@gmail.com</a:t>
-            </a:r>
-            <a:r>
-              <a:rPr lang="uk-UA" sz="1200" dirty="0">
-                <a:solidFill>
-                  <a:schemeClr val="bg1"/>
-                </a:solidFill>
-                <a:latin typeface="Calibri" pitchFamily="34" charset="0"/>
-                <a:ea typeface="Calibri" pitchFamily="34" charset="-122"/>
-                <a:cs typeface="Calibri" pitchFamily="34" charset="-120"/>
-              </a:rPr>
-              <a:t> </a:t>
-            </a:r>
-            <a:r>
-              <a:rPr lang="en-US" sz="1400" i="1" dirty="0">
-                <a:solidFill>
-                  <a:schemeClr val="bg1"/>
-                </a:solidFill>
-                <a:latin typeface="Calibri" pitchFamily="34" charset="0"/>
-                <a:ea typeface="Calibri" pitchFamily="34" charset="-122"/>
-                <a:cs typeface="Calibri" pitchFamily="34" charset="-120"/>
-              </a:rPr>
-              <a:t>·</a:t>
-            </a:r>
-            <a:r>
-              <a:rPr lang="uk-UA" sz="1400" i="1" dirty="0">
-                <a:solidFill>
-                  <a:schemeClr val="bg1"/>
-                </a:solidFill>
-                <a:latin typeface="Calibri" pitchFamily="34" charset="0"/>
-                <a:ea typeface="Calibri" pitchFamily="34" charset="-122"/>
-                <a:cs typeface="Calibri" pitchFamily="34" charset="-120"/>
-              </a:rPr>
-              <a:t> </a:t>
-            </a:r>
-            <a:r>
-              <a:rPr lang="en-US" sz="1200" dirty="0">
-                <a:solidFill>
-                  <a:schemeClr val="bg1"/>
-                </a:solidFill>
-              </a:rPr>
-              <a:t>R.Kolomiiets01@mil.ua</a:t>
-            </a:r>
-          </a:p>
-        </p:txBody>
-      </p:sp>
-      <p:sp>
-        <p:nvSpPr>
-          <p:cNvPr id="13" name="Shape 9"/>
-          <p:cNvSpPr/>
-          <p:nvPr/>
-        </p:nvSpPr>
-        <p:spPr>
-          <a:xfrm>
-            <a:off x="6827901" y="3794760"/>
-            <a:ext cx="310896" cy="310896"/>
-          </a:xfrm>
-          <a:prstGeom prst="ellipse">
-            <a:avLst/>
-          </a:prstGeom>
-          <a:solidFill>
-            <a:srgbClr val="3E4637"/>
-          </a:solidFill>
-          <a:ln/>
-        </p:spPr>
-      </p:sp>
-      <p:sp>
-        <p:nvSpPr>
-          <p:cNvPr id="15" name="Text 10"/>
-          <p:cNvSpPr/>
-          <p:nvPr/>
-        </p:nvSpPr>
-        <p:spPr>
-          <a:xfrm>
-            <a:off x="7211949" y="3749040"/>
-            <a:ext cx="1311402" cy="411480"/>
-          </a:xfrm>
-          <a:prstGeom prst="rect">
-            <a:avLst/>
-          </a:prstGeom>
-          <a:noFill/>
-          <a:ln/>
-        </p:spPr>
-        <p:txBody>
-          <a:bodyPr wrap="square" rtlCol="0" anchor="ctr"/>
-          <a:lstStyle/>
-          <a:p>
-            <a:pPr marL="0" indent="0">
-              <a:buNone/>
-            </a:pPr>
-            <a:r>
-              <a:rPr lang="en-US" sz="1300" dirty="0">
-                <a:solidFill>
                   <a:srgbClr val="FFFFFF"/>
                 </a:solidFill>
                 <a:latin typeface="Calibri" pitchFamily="34" charset="0"/>
                 <a:ea typeface="Calibri" pitchFamily="34" charset="-122"/>
                 <a:cs typeface="Calibri" pitchFamily="34" charset="-120"/>
               </a:rPr>
-              <a:t>ID </a:t>
-            </a:r>
-            <a:r>
-              <a:rPr lang="uk-UA" sz="1300" dirty="0">
-                <a:solidFill>
-                  <a:srgbClr val="FFFFFF"/>
-                </a:solidFill>
-                <a:latin typeface="Calibri" pitchFamily="34" charset="0"/>
-                <a:ea typeface="Calibri" pitchFamily="34" charset="-122"/>
-                <a:cs typeface="Calibri" pitchFamily="34" charset="-120"/>
-              </a:rPr>
-              <a:t>- </a:t>
-            </a:r>
-            <a:r>
-              <a:rPr lang="en-US" sz="1300" dirty="0">
-                <a:solidFill>
-                  <a:srgbClr val="FFFFFF"/>
-                </a:solidFill>
-                <a:latin typeface="Calibri" pitchFamily="34" charset="0"/>
-                <a:ea typeface="Calibri" pitchFamily="34" charset="-122"/>
-                <a:cs typeface="Calibri" pitchFamily="34" charset="-120"/>
-              </a:rPr>
-              <a:t>325 003 092</a:t>
-            </a:r>
-            <a:endParaRPr lang="en-US" sz="1300" dirty="0"/>
+              <a:t>romankolomiets@gmail.com · R.Kolomiiets01@mil.ua</a:t>
+            </a:r>
+            <a:endParaRPr lang="en-US" sz="1200" dirty="0"/>
           </a:p>
         </p:txBody>
       </p:sp>
       <p:pic>
         <p:nvPicPr>
-          <p:cNvPr id="17" name="Рисунок 16">
-            <a:extLst>
-              <a:ext uri="{FF2B5EF4-FFF2-40B4-BE49-F238E27FC236}">
-                <a16:creationId xmlns:a16="http://schemas.microsoft.com/office/drawing/2014/main" id="{D2F44F2B-D2B7-6621-E4E7-658560880DA7}"/>
-              </a:ext>
-            </a:extLst>
-          </p:cNvPr>
+          <p:cNvPr id="13" name="Image 2" descr="/home/claude/armia_plus.png"/>
           <p:cNvPicPr>
             <a:picLocks noChangeAspect="1"/>
           </p:cNvPicPr>
@@ -1825,7 +1904,7 @@
         </p:blipFill>
         <p:spPr>
           <a:xfrm>
-            <a:off x="6827901" y="3794760"/>
+            <a:off x="6830568" y="3794760"/>
             <a:ext cx="310896" cy="310896"/>
           </a:xfrm>
           <a:prstGeom prst="rect">
@@ -1833,6 +1912,738 @@
           </a:prstGeom>
         </p:spPr>
       </p:pic>
+      <p:sp>
+        <p:nvSpPr>
+          <p:cNvPr id="14" name="Text 9"/>
+          <p:cNvSpPr/>
+          <p:nvPr/>
+        </p:nvSpPr>
+        <p:spPr>
+          <a:xfrm>
+            <a:off x="7214616" y="3749040"/>
+            <a:ext cx="1371600" cy="411480"/>
+          </a:xfrm>
+          <a:prstGeom prst="rect">
+            <a:avLst/>
+          </a:prstGeom>
+          <a:noFill/>
+          <a:ln/>
+        </p:spPr>
+        <p:txBody>
+          <a:bodyPr wrap="square" rtlCol="0" anchor="ctr"/>
+          <a:lstStyle/>
+          <a:p>
+            <a:pPr marL="0" indent="0">
+              <a:buNone/>
+            </a:pPr>
+            <a:r>
+              <a:rPr lang="en-US" sz="1300" dirty="0">
+                <a:solidFill>
+                  <a:srgbClr val="FFFFFF"/>
+                </a:solidFill>
+                <a:latin typeface="Calibri" pitchFamily="34" charset="0"/>
+                <a:ea typeface="Calibri" pitchFamily="34" charset="-122"/>
+                <a:cs typeface="Calibri" pitchFamily="34" charset="-120"/>
+              </a:rPr>
+              <a:t>ID - 325 003 092</a:t>
+            </a:r>
+            <a:endParaRPr lang="en-US" sz="1300" dirty="0"/>
+          </a:p>
+        </p:txBody>
+      </p:sp>
+    </p:spTree>
+  </p:cSld>
+  <p:clrMapOvr>
+    <a:masterClrMapping/>
+  </p:clrMapOvr>
+</p:sld>
+</file>
+
+<file path=ppt/slides/slide10.xml><?xml version="1.0" encoding="utf-8"?>
+<p:sld xmlns:a="http://schemas.openxmlformats.org/drawingml/2006/main" xmlns:r="http://schemas.openxmlformats.org/officeDocument/2006/relationships" xmlns:p="http://schemas.openxmlformats.org/presentationml/2006/main">
+  <p:cSld name="Slide 10">
+    <p:bg>
+      <p:bgPr>
+        <a:solidFill>
+          <a:srgbClr val="EFEBDD"/>
+        </a:solidFill>
+        <a:effectLst/>
+      </p:bgPr>
+    </p:bg>
+    <p:spTree>
+      <p:nvGrpSpPr>
+        <p:cNvPr id="1" name=""/>
+        <p:cNvGrpSpPr/>
+        <p:nvPr/>
+      </p:nvGrpSpPr>
+      <p:grpSpPr>
+        <a:xfrm>
+          <a:off x="0" y="0"/>
+          <a:ext cx="0" cy="0"/>
+          <a:chOff x="0" y="0"/>
+          <a:chExt cx="0" cy="0"/>
+        </a:xfrm>
+      </p:grpSpPr>
+      <p:sp>
+        <p:nvSpPr>
+          <p:cNvPr id="2" name="Text 0"/>
+          <p:cNvSpPr/>
+          <p:nvPr/>
+        </p:nvSpPr>
+        <p:spPr>
+          <a:xfrm>
+            <a:off x="502920" y="274320"/>
+            <a:ext cx="8229600" cy="502920"/>
+          </a:xfrm>
+          <a:prstGeom prst="rect">
+            <a:avLst/>
+          </a:prstGeom>
+          <a:noFill/>
+          <a:ln/>
+        </p:spPr>
+        <p:txBody>
+          <a:bodyPr wrap="square" rtlCol="0" anchor="ctr"/>
+          <a:lstStyle/>
+          <a:p>
+            <a:pPr marL="0" indent="0">
+              <a:buNone/>
+            </a:pPr>
+            <a:r>
+              <a:rPr lang="en-US" sz="3000" b="1" dirty="0">
+                <a:solidFill>
+                  <a:srgbClr val="3E4637"/>
+                </a:solidFill>
+                <a:latin typeface="Calibri" pitchFamily="34" charset="0"/>
+                <a:ea typeface="Calibri" pitchFamily="34" charset="-122"/>
+                <a:cs typeface="Calibri" pitchFamily="34" charset="-120"/>
+              </a:rPr>
+              <a:t>ЗСУ — приклади візуалізації</a:t>
+            </a:r>
+            <a:endParaRPr lang="en-US" sz="3000" dirty="0"/>
+          </a:p>
+        </p:txBody>
+      </p:sp>
+      <p:pic>
+        <p:nvPicPr>
+          <p:cNvPr id="3" name="Image 0" descr="/home/claude/viz/viz1_topology.png"/>
+          <p:cNvPicPr>
+            <a:picLocks noChangeAspect="1"/>
+          </p:cNvPicPr>
+          <p:nvPr/>
+        </p:nvPicPr>
+        <p:blipFill>
+          <a:blip r:embed="rId3"/>
+          <a:stretch>
+            <a:fillRect/>
+          </a:stretch>
+        </p:blipFill>
+        <p:spPr>
+          <a:xfrm>
+            <a:off x="411480" y="1188720"/>
+            <a:ext cx="4114800" cy="2825496"/>
+          </a:xfrm>
+          <a:prstGeom prst="rect">
+            <a:avLst/>
+          </a:prstGeom>
+        </p:spPr>
+      </p:pic>
+      <p:sp>
+        <p:nvSpPr>
+          <p:cNvPr id="4" name="Text 1"/>
+          <p:cNvSpPr/>
+          <p:nvPr/>
+        </p:nvSpPr>
+        <p:spPr>
+          <a:xfrm>
+            <a:off x="411480" y="4069080"/>
+            <a:ext cx="4114800" cy="365760"/>
+          </a:xfrm>
+          <a:prstGeom prst="rect">
+            <a:avLst/>
+          </a:prstGeom>
+          <a:noFill/>
+          <a:ln/>
+        </p:spPr>
+        <p:txBody>
+          <a:bodyPr wrap="square" rtlCol="0" anchor="ctr"/>
+          <a:lstStyle/>
+          <a:p>
+            <a:pPr marL="0" indent="0" algn="ctr">
+              <a:buNone/>
+            </a:pPr>
+            <a:r>
+              <a:rPr lang="en-US" sz="1150" dirty="0">
+                <a:solidFill>
+                  <a:srgbClr val="6B7060"/>
+                </a:solidFill>
+                <a:latin typeface="Calibri" pitchFamily="34" charset="0"/>
+                <a:ea typeface="Calibri" pitchFamily="34" charset="-122"/>
+                <a:cs typeface="Calibri" pitchFamily="34" charset="-120"/>
+              </a:rPr>
+              <a:t>Схема вузла зв'язку · наказ №140</a:t>
+            </a:r>
+            <a:endParaRPr lang="en-US" sz="1150" dirty="0"/>
+          </a:p>
+        </p:txBody>
+      </p:sp>
+      <p:pic>
+        <p:nvPicPr>
+          <p:cNvPr id="5" name="Image 1" descr="/home/claude/viz/viz3_dashboard.png"/>
+          <p:cNvPicPr>
+            <a:picLocks noChangeAspect="1"/>
+          </p:cNvPicPr>
+          <p:nvPr/>
+        </p:nvPicPr>
+        <p:blipFill>
+          <a:blip r:embed="rId4"/>
+          <a:stretch>
+            <a:fillRect/>
+          </a:stretch>
+        </p:blipFill>
+        <p:spPr>
+          <a:xfrm>
+            <a:off x="4709160" y="1005840"/>
+            <a:ext cx="3977640" cy="1947672"/>
+          </a:xfrm>
+          <a:prstGeom prst="rect">
+            <a:avLst/>
+          </a:prstGeom>
+        </p:spPr>
+      </p:pic>
+      <p:pic>
+        <p:nvPicPr>
+          <p:cNvPr id="6" name="Image 2" descr="/home/claude/viz/viz2_roster.png"/>
+          <p:cNvPicPr>
+            <a:picLocks noChangeAspect="1"/>
+          </p:cNvPicPr>
+          <p:nvPr/>
+        </p:nvPicPr>
+        <p:blipFill>
+          <a:blip r:embed="rId5"/>
+          <a:stretch>
+            <a:fillRect/>
+          </a:stretch>
+        </p:blipFill>
+        <p:spPr>
+          <a:xfrm>
+            <a:off x="4709160" y="3063240"/>
+            <a:ext cx="3977640" cy="1865376"/>
+          </a:xfrm>
+          <a:prstGeom prst="rect">
+            <a:avLst/>
+          </a:prstGeom>
+        </p:spPr>
+      </p:pic>
+    </p:spTree>
+  </p:cSld>
+  <p:clrMapOvr>
+    <a:masterClrMapping/>
+  </p:clrMapOvr>
+</p:sld>
+</file>
+
+<file path=ppt/slides/slide11.xml><?xml version="1.0" encoding="utf-8"?>
+<p:sld xmlns:a="http://schemas.openxmlformats.org/drawingml/2006/main" xmlns:r="http://schemas.openxmlformats.org/officeDocument/2006/relationships" xmlns:p="http://schemas.openxmlformats.org/presentationml/2006/main">
+  <p:cSld name="Slide 11">
+    <p:bg>
+      <p:bgPr>
+        <a:solidFill>
+          <a:srgbClr val="2E3429"/>
+        </a:solidFill>
+        <a:effectLst/>
+      </p:bgPr>
+    </p:bg>
+    <p:spTree>
+      <p:nvGrpSpPr>
+        <p:cNvPr id="1" name=""/>
+        <p:cNvGrpSpPr/>
+        <p:nvPr/>
+      </p:nvGrpSpPr>
+      <p:grpSpPr>
+        <a:xfrm>
+          <a:off x="0" y="0"/>
+          <a:ext cx="0" cy="0"/>
+          <a:chOff x="0" y="0"/>
+          <a:chExt cx="0" cy="0"/>
+        </a:xfrm>
+      </p:grpSpPr>
+      <p:sp>
+        <p:nvSpPr>
+          <p:cNvPr id="2" name="Text 0"/>
+          <p:cNvSpPr/>
+          <p:nvPr/>
+        </p:nvSpPr>
+        <p:spPr>
+          <a:xfrm>
+            <a:off x="502920" y="365760"/>
+            <a:ext cx="8229600" cy="548640"/>
+          </a:xfrm>
+          <a:prstGeom prst="rect">
+            <a:avLst/>
+          </a:prstGeom>
+          <a:noFill/>
+          <a:ln/>
+        </p:spPr>
+        <p:txBody>
+          <a:bodyPr wrap="square" rtlCol="0" anchor="ctr"/>
+          <a:lstStyle/>
+          <a:p>
+            <a:pPr marL="0" indent="0">
+              <a:buNone/>
+            </a:pPr>
+            <a:r>
+              <a:rPr lang="en-US" sz="3200" b="1" dirty="0">
+                <a:solidFill>
+                  <a:srgbClr val="FFFFFF"/>
+                </a:solidFill>
+                <a:latin typeface="Calibri" pitchFamily="34" charset="0"/>
+                <a:ea typeface="Calibri" pitchFamily="34" charset="-122"/>
+                <a:cs typeface="Calibri" pitchFamily="34" charset="-120"/>
+              </a:rPr>
+              <a:t>Чому я — для МОУ</a:t>
+            </a:r>
+            <a:endParaRPr lang="en-US" sz="3200" dirty="0"/>
+          </a:p>
+        </p:txBody>
+      </p:sp>
+      <p:pic>
+        <p:nvPicPr>
+          <p:cNvPr id="3" name="Image 0" descr="preencoded.png"/>
+          <p:cNvPicPr>
+            <a:picLocks noChangeAspect="1"/>
+          </p:cNvPicPr>
+          <p:nvPr/>
+        </p:nvPicPr>
+        <p:blipFill>
+          <a:blip r:embed="rId3"/>
+          <a:stretch>
+            <a:fillRect/>
+          </a:stretch>
+        </p:blipFill>
+        <p:spPr>
+          <a:xfrm>
+            <a:off x="640080" y="1197864"/>
+            <a:ext cx="274320" cy="274320"/>
+          </a:xfrm>
+          <a:prstGeom prst="rect">
+            <a:avLst/>
+          </a:prstGeom>
+        </p:spPr>
+      </p:pic>
+      <p:sp>
+        <p:nvSpPr>
+          <p:cNvPr id="4" name="Text 1"/>
+          <p:cNvSpPr/>
+          <p:nvPr/>
+        </p:nvSpPr>
+        <p:spPr>
+          <a:xfrm>
+            <a:off x="1051560" y="1143000"/>
+            <a:ext cx="7589520" cy="502920"/>
+          </a:xfrm>
+          <a:prstGeom prst="rect">
+            <a:avLst/>
+          </a:prstGeom>
+          <a:noFill/>
+          <a:ln/>
+        </p:spPr>
+        <p:txBody>
+          <a:bodyPr wrap="square" rtlCol="0" anchor="ctr"/>
+          <a:lstStyle/>
+          <a:p>
+            <a:pPr marL="0" indent="0">
+              <a:buNone/>
+            </a:pPr>
+            <a:r>
+              <a:rPr lang="en-US" sz="1450" dirty="0">
+                <a:solidFill>
+                  <a:srgbClr val="E8E6DB"/>
+                </a:solidFill>
+                <a:latin typeface="Calibri" pitchFamily="34" charset="0"/>
+                <a:ea typeface="Calibri" pitchFamily="34" charset="-122"/>
+                <a:cs typeface="Calibri" pitchFamily="34" charset="-120"/>
+              </a:rPr>
+              <a:t>Чинний військовослужбовець ЗСУ, в/ч А5118 — відповідаю умовам переведення у вакансії</a:t>
+            </a:r>
+            <a:endParaRPr lang="en-US" sz="1450" dirty="0"/>
+          </a:p>
+        </p:txBody>
+      </p:sp>
+      <p:pic>
+        <p:nvPicPr>
+          <p:cNvPr id="5" name="Image 1" descr="preencoded.png"/>
+          <p:cNvPicPr>
+            <a:picLocks noChangeAspect="1"/>
+          </p:cNvPicPr>
+          <p:nvPr/>
+        </p:nvPicPr>
+        <p:blipFill>
+          <a:blip r:embed="rId3"/>
+          <a:stretch>
+            <a:fillRect/>
+          </a:stretch>
+        </p:blipFill>
+        <p:spPr>
+          <a:xfrm>
+            <a:off x="640080" y="1764792"/>
+            <a:ext cx="274320" cy="274320"/>
+          </a:xfrm>
+          <a:prstGeom prst="rect">
+            <a:avLst/>
+          </a:prstGeom>
+        </p:spPr>
+      </p:pic>
+      <p:sp>
+        <p:nvSpPr>
+          <p:cNvPr id="6" name="Text 2"/>
+          <p:cNvSpPr/>
+          <p:nvPr/>
+        </p:nvSpPr>
+        <p:spPr>
+          <a:xfrm>
+            <a:off x="1051560" y="1709928"/>
+            <a:ext cx="7589520" cy="502920"/>
+          </a:xfrm>
+          <a:prstGeom prst="rect">
+            <a:avLst/>
+          </a:prstGeom>
+          <a:noFill/>
+          <a:ln/>
+        </p:spPr>
+        <p:txBody>
+          <a:bodyPr wrap="square" rtlCol="0" anchor="ctr"/>
+          <a:lstStyle/>
+          <a:p>
+            <a:pPr marL="0" indent="0">
+              <a:buNone/>
+            </a:pPr>
+            <a:r>
+              <a:rPr lang="en-US" sz="1450" dirty="0">
+                <a:solidFill>
+                  <a:srgbClr val="E8E6DB"/>
+                </a:solidFill>
+                <a:latin typeface="Calibri" pitchFamily="34" charset="0"/>
+                <a:ea typeface="Calibri" pitchFamily="34" charset="-122"/>
+                <a:cs typeface="Calibri" pitchFamily="34" charset="-120"/>
+              </a:rPr>
+              <a:t>17 років дизайну + інженерна освіта КПІ + досвід систем оборонного сектору</a:t>
+            </a:r>
+            <a:endParaRPr lang="en-US" sz="1450" dirty="0"/>
+          </a:p>
+        </p:txBody>
+      </p:sp>
+      <p:pic>
+        <p:nvPicPr>
+          <p:cNvPr id="7" name="Image 2" descr="preencoded.png"/>
+          <p:cNvPicPr>
+            <a:picLocks noChangeAspect="1"/>
+          </p:cNvPicPr>
+          <p:nvPr/>
+        </p:nvPicPr>
+        <p:blipFill>
+          <a:blip r:embed="rId3"/>
+          <a:stretch>
+            <a:fillRect/>
+          </a:stretch>
+        </p:blipFill>
+        <p:spPr>
+          <a:xfrm>
+            <a:off x="640080" y="2331720"/>
+            <a:ext cx="274320" cy="274320"/>
+          </a:xfrm>
+          <a:prstGeom prst="rect">
+            <a:avLst/>
+          </a:prstGeom>
+        </p:spPr>
+      </p:pic>
+      <p:sp>
+        <p:nvSpPr>
+          <p:cNvPr id="8" name="Text 3"/>
+          <p:cNvSpPr/>
+          <p:nvPr/>
+        </p:nvSpPr>
+        <p:spPr>
+          <a:xfrm>
+            <a:off x="1051560" y="2276856"/>
+            <a:ext cx="7589520" cy="502920"/>
+          </a:xfrm>
+          <a:prstGeom prst="rect">
+            <a:avLst/>
+          </a:prstGeom>
+          <a:noFill/>
+          <a:ln/>
+        </p:spPr>
+        <p:txBody>
+          <a:bodyPr wrap="square" rtlCol="0" anchor="ctr"/>
+          <a:lstStyle/>
+          <a:p>
+            <a:pPr marL="0" indent="0">
+              <a:buNone/>
+            </a:pPr>
+            <a:r>
+              <a:rPr lang="en-US" sz="1450" dirty="0">
+                <a:solidFill>
+                  <a:srgbClr val="E8E6DB"/>
+                </a:solidFill>
+                <a:latin typeface="Calibri" pitchFamily="34" charset="0"/>
+                <a:ea typeface="Calibri" pitchFamily="34" charset="-122"/>
+                <a:cs typeface="Calibri" pitchFamily="34" charset="-120"/>
+              </a:rPr>
+              <a:t>Наказ ГШ ЗСУ №40 — військове діловодство, оформлення службових документів</a:t>
+            </a:r>
+            <a:endParaRPr lang="en-US" sz="1450" dirty="0"/>
+          </a:p>
+        </p:txBody>
+      </p:sp>
+      <p:pic>
+        <p:nvPicPr>
+          <p:cNvPr id="9" name="Image 3" descr="preencoded.png"/>
+          <p:cNvPicPr>
+            <a:picLocks noChangeAspect="1"/>
+          </p:cNvPicPr>
+          <p:nvPr/>
+        </p:nvPicPr>
+        <p:blipFill>
+          <a:blip r:embed="rId3"/>
+          <a:stretch>
+            <a:fillRect/>
+          </a:stretch>
+        </p:blipFill>
+        <p:spPr>
+          <a:xfrm>
+            <a:off x="640080" y="2898648"/>
+            <a:ext cx="274320" cy="274320"/>
+          </a:xfrm>
+          <a:prstGeom prst="rect">
+            <a:avLst/>
+          </a:prstGeom>
+        </p:spPr>
+      </p:pic>
+      <p:sp>
+        <p:nvSpPr>
+          <p:cNvPr id="10" name="Text 4"/>
+          <p:cNvSpPr/>
+          <p:nvPr/>
+        </p:nvSpPr>
+        <p:spPr>
+          <a:xfrm>
+            <a:off x="1051560" y="2843784"/>
+            <a:ext cx="7589520" cy="502920"/>
+          </a:xfrm>
+          <a:prstGeom prst="rect">
+            <a:avLst/>
+          </a:prstGeom>
+          <a:noFill/>
+          <a:ln/>
+        </p:spPr>
+        <p:txBody>
+          <a:bodyPr wrap="square" rtlCol="0" anchor="ctr"/>
+          <a:lstStyle/>
+          <a:p>
+            <a:pPr marL="0" indent="0">
+              <a:buNone/>
+            </a:pPr>
+            <a:r>
+              <a:rPr lang="en-US" sz="1450" dirty="0">
+                <a:solidFill>
+                  <a:srgbClr val="E8E6DB"/>
+                </a:solidFill>
+                <a:latin typeface="Calibri" pitchFamily="34" charset="0"/>
+                <a:ea typeface="Calibri" pitchFamily="34" charset="-122"/>
+                <a:cs typeface="Calibri" pitchFamily="34" charset="-120"/>
+              </a:rPr>
+              <a:t>Наказ ГК ЗСУ №140 — оперативні (бойові) документи, знаки НАТО: Delta та друковані карти</a:t>
+            </a:r>
+            <a:endParaRPr lang="en-US" sz="1450" dirty="0"/>
+          </a:p>
+        </p:txBody>
+      </p:sp>
+      <p:pic>
+        <p:nvPicPr>
+          <p:cNvPr id="11" name="Image 4" descr="preencoded.png"/>
+          <p:cNvPicPr>
+            <a:picLocks noChangeAspect="1"/>
+          </p:cNvPicPr>
+          <p:nvPr/>
+        </p:nvPicPr>
+        <p:blipFill>
+          <a:blip r:embed="rId3"/>
+          <a:stretch>
+            <a:fillRect/>
+          </a:stretch>
+        </p:blipFill>
+        <p:spPr>
+          <a:xfrm>
+            <a:off x="640080" y="3465576"/>
+            <a:ext cx="274320" cy="274320"/>
+          </a:xfrm>
+          <a:prstGeom prst="rect">
+            <a:avLst/>
+          </a:prstGeom>
+        </p:spPr>
+      </p:pic>
+      <p:sp>
+        <p:nvSpPr>
+          <p:cNvPr id="12" name="Text 5"/>
+          <p:cNvSpPr/>
+          <p:nvPr/>
+        </p:nvSpPr>
+        <p:spPr>
+          <a:xfrm>
+            <a:off x="1051560" y="3410712"/>
+            <a:ext cx="7589520" cy="502920"/>
+          </a:xfrm>
+          <a:prstGeom prst="rect">
+            <a:avLst/>
+          </a:prstGeom>
+          <a:noFill/>
+          <a:ln/>
+        </p:spPr>
+        <p:txBody>
+          <a:bodyPr wrap="square" rtlCol="0" anchor="ctr"/>
+          <a:lstStyle/>
+          <a:p>
+            <a:pPr marL="0" indent="0">
+              <a:buNone/>
+            </a:pPr>
+            <a:r>
+              <a:rPr lang="en-US" sz="1450" dirty="0">
+                <a:solidFill>
+                  <a:srgbClr val="E8E6DB"/>
+                </a:solidFill>
+                <a:latin typeface="Calibri" pitchFamily="34" charset="0"/>
+                <a:ea typeface="Calibri" pitchFamily="34" charset="-122"/>
+                <a:cs typeface="Calibri" pitchFamily="34" charset="-120"/>
+              </a:rPr>
+              <a:t>Швидко навчаюся, ініціативний, працюю в умовах стислих дедлайнів</a:t>
+            </a:r>
+            <a:endParaRPr lang="en-US" sz="1450" dirty="0"/>
+          </a:p>
+        </p:txBody>
+      </p:sp>
+      <p:sp>
+        <p:nvSpPr>
+          <p:cNvPr id="13" name="Shape 6"/>
+          <p:cNvSpPr/>
+          <p:nvPr/>
+        </p:nvSpPr>
+        <p:spPr>
+          <a:xfrm>
+            <a:off x="640080" y="4160520"/>
+            <a:ext cx="7863840" cy="0"/>
+          </a:xfrm>
+          <a:prstGeom prst="line">
+            <a:avLst/>
+          </a:prstGeom>
+          <a:noFill/>
+          <a:ln w="12700">
+            <a:solidFill>
+              <a:srgbClr val="B08D3A"/>
+            </a:solidFill>
+            <a:prstDash val="solid"/>
+          </a:ln>
+        </p:spPr>
+      </p:sp>
+      <p:sp>
+        <p:nvSpPr>
+          <p:cNvPr id="14" name="Text 7"/>
+          <p:cNvSpPr/>
+          <p:nvPr/>
+        </p:nvSpPr>
+        <p:spPr>
+          <a:xfrm>
+            <a:off x="640080" y="4297680"/>
+            <a:ext cx="7863840" cy="365760"/>
+          </a:xfrm>
+          <a:prstGeom prst="rect">
+            <a:avLst/>
+          </a:prstGeom>
+          <a:noFill/>
+          <a:ln/>
+        </p:spPr>
+        <p:txBody>
+          <a:bodyPr wrap="square" rtlCol="0" anchor="ctr"/>
+          <a:lstStyle/>
+          <a:p>
+            <a:pPr marL="0" indent="0">
+              <a:buNone/>
+            </a:pPr>
+            <a:r>
+              <a:rPr lang="en-US" sz="1400" b="1" dirty="0">
+                <a:solidFill>
+                  <a:srgbClr val="FFFFFF"/>
+                </a:solidFill>
+                <a:latin typeface="Calibri" pitchFamily="34" charset="0"/>
+                <a:ea typeface="Calibri" pitchFamily="34" charset="-122"/>
+                <a:cs typeface="Calibri" pitchFamily="34" charset="-120"/>
+              </a:rPr>
+              <a:t>Коломієць Роман   </a:t>
+            </a:r>
+            <a:r>
+              <a:rPr lang="en-US" sz="1200" dirty="0">
+                <a:solidFill>
+                  <a:srgbClr val="C9CDBF"/>
+                </a:solidFill>
+                <a:latin typeface="Calibri" pitchFamily="34" charset="0"/>
+                <a:ea typeface="Calibri" pitchFamily="34" charset="-122"/>
+                <a:cs typeface="Calibri" pitchFamily="34" charset="-120"/>
+              </a:rPr>
+              <a:t>098 707-74-67  ·  romankolomiets@gmail.com  ·  R.Kolomiiets01@mil.ua  ·  Київ</a:t>
+            </a:r>
+            <a:endParaRPr lang="en-US" sz="1400" dirty="0"/>
+          </a:p>
+        </p:txBody>
+      </p:sp>
+      <p:sp>
+        <p:nvSpPr>
+          <p:cNvPr id="15" name="Text 8"/>
+          <p:cNvSpPr/>
+          <p:nvPr/>
+        </p:nvSpPr>
+        <p:spPr>
+          <a:xfrm>
+            <a:off x="640080" y="4617720"/>
+            <a:ext cx="7863840" cy="320040"/>
+          </a:xfrm>
+          <a:prstGeom prst="rect">
+            <a:avLst/>
+          </a:prstGeom>
+          <a:noFill/>
+          <a:ln/>
+        </p:spPr>
+        <p:txBody>
+          <a:bodyPr wrap="square" rtlCol="0" anchor="ctr"/>
+          <a:lstStyle/>
+          <a:p>
+            <a:pPr marL="0" indent="0">
+              <a:buNone/>
+            </a:pPr>
+            <a:r>
+              <a:rPr lang="en-US" sz="1200" dirty="0">
+                <a:solidFill>
+                  <a:srgbClr val="C9CDBF"/>
+                </a:solidFill>
+                <a:latin typeface="Calibri" pitchFamily="34" charset="0"/>
+                <a:ea typeface="Calibri" pitchFamily="34" charset="-122"/>
+                <a:cs typeface="Calibri" pitchFamily="34" charset="-120"/>
+              </a:rPr>
+              <a:t>Повний пакет онлайн:  </a:t>
+            </a:r>
+            <a:r>
+              <a:rPr lang="en-US" sz="1300" b="1" dirty="0">
+                <a:solidFill>
+                  <a:srgbClr val="B08D3A"/>
+                </a:solidFill>
+                <a:latin typeface="Calibri" pitchFamily="34" charset="0"/>
+                <a:ea typeface="Calibri" pitchFamily="34" charset="-122"/>
+                <a:cs typeface="Calibri" pitchFamily="34" charset="-120"/>
+              </a:rPr>
+              <a:t>romankolomiets.github.io/cv</a:t>
+            </a:r>
+            <a:endParaRPr lang="en-US" sz="1200" dirty="0"/>
+          </a:p>
+        </p:txBody>
+      </p:sp>
     </p:spTree>
   </p:cSld>
   <p:clrMapOvr>
@@ -2074,7 +2885,7 @@
                 <a:ea typeface="Calibri" pitchFamily="34" charset="-122"/>
                 <a:cs typeface="Calibri" pitchFamily="34" charset="-120"/>
               </a:rPr>
-              <a:t>21</a:t>
+              <a:t>26</a:t>
             </a:r>
             <a:endParaRPr lang="en-US" sz="2400" dirty="0"/>
           </a:p>
@@ -2113,7 +2924,7 @@
                 <a:ea typeface="Calibri" pitchFamily="34" charset="-122"/>
                 <a:cs typeface="Calibri" pitchFamily="34" charset="-120"/>
               </a:rPr>
-              <a:t>сертифікат · 2026</a:t>
+              <a:t>сертифікатів · 2026</a:t>
             </a:r>
             <a:endParaRPr lang="en-US" sz="1150" dirty="0"/>
           </a:p>
@@ -3859,7 +4670,7 @@
                 <a:ea typeface="Calibri" pitchFamily="34" charset="-122"/>
                 <a:cs typeface="Calibri" pitchFamily="34" charset="-120"/>
               </a:rPr>
-              <a:t>Розгортання ІКС ВIРAЖ, ЗАТК Слід / Тест (МедЕВАК), MDM · робота в Delta</a:t>
+              <a:t>Розгортання СПЗ ВIРAЖ, ЗАТК Слід / Тест (МедЕВАК), MDM · робота в ІКС Delta</a:t>
             </a:r>
             <a:endParaRPr lang="en-US" sz="1250" dirty="0"/>
           </a:p>
@@ -5529,73 +6340,7 @@
                 <a:ea typeface="Calibri" pitchFamily="34" charset="-122"/>
                 <a:cs typeface="Calibri" pitchFamily="34" charset="-120"/>
               </a:rPr>
-              <a:t>Zabbix · </a:t>
-            </a:r>
-            <a:r>
-              <a:rPr lang="uk-UA" sz="1100" dirty="0">
-                <a:solidFill>
-                  <a:srgbClr val="6B7060"/>
-                </a:solidFill>
-                <a:latin typeface="Calibri" pitchFamily="34" charset="0"/>
-                <a:ea typeface="Calibri" pitchFamily="34" charset="-122"/>
-                <a:cs typeface="Calibri" pitchFamily="34" charset="-120"/>
-              </a:rPr>
-              <a:t>ІКС </a:t>
-            </a:r>
-            <a:r>
-              <a:rPr lang="en-US" sz="1100" dirty="0">
-                <a:solidFill>
-                  <a:srgbClr val="6B7060"/>
-                </a:solidFill>
-                <a:latin typeface="Calibri" pitchFamily="34" charset="0"/>
-                <a:ea typeface="Calibri" pitchFamily="34" charset="-122"/>
-                <a:cs typeface="Calibri" pitchFamily="34" charset="-120"/>
-              </a:rPr>
-              <a:t>Delta · </a:t>
-            </a:r>
-            <a:r>
-              <a:rPr lang="uk-UA" sz="1100" dirty="0">
-                <a:solidFill>
-                  <a:srgbClr val="6B7060"/>
-                </a:solidFill>
-                <a:latin typeface="Calibri" pitchFamily="34" charset="0"/>
-                <a:ea typeface="Calibri" pitchFamily="34" charset="-122"/>
-                <a:cs typeface="Calibri" pitchFamily="34" charset="-120"/>
-              </a:rPr>
-              <a:t>СПЗ</a:t>
-            </a:r>
-            <a:r>
-              <a:rPr lang="en-US" sz="1100" dirty="0">
-                <a:solidFill>
-                  <a:srgbClr val="6B7060"/>
-                </a:solidFill>
-                <a:latin typeface="Calibri" pitchFamily="34" charset="0"/>
-                <a:ea typeface="Calibri" pitchFamily="34" charset="-122"/>
-                <a:cs typeface="Calibri" pitchFamily="34" charset="-120"/>
-              </a:rPr>
-              <a:t> ВI</a:t>
-            </a:r>
-            <a:r>
-              <a:rPr lang="uk-UA" sz="1100" dirty="0">
-                <a:solidFill>
-                  <a:srgbClr val="6B7060"/>
-                </a:solidFill>
-                <a:latin typeface="Calibri" pitchFamily="34" charset="0"/>
-                <a:ea typeface="Calibri" pitchFamily="34" charset="-122"/>
-                <a:cs typeface="Calibri" pitchFamily="34" charset="-120"/>
-              </a:rPr>
-              <a:t>Р</a:t>
-            </a:r>
-            <a:r>
-              <a:rPr lang="en-US" sz="1100" dirty="0">
-                <a:solidFill>
-                  <a:srgbClr val="6B7060"/>
-                </a:solidFill>
-                <a:latin typeface="Calibri" pitchFamily="34" charset="0"/>
-                <a:ea typeface="Calibri" pitchFamily="34" charset="-122"/>
-                <a:cs typeface="Calibri" pitchFamily="34" charset="-120"/>
-              </a:rPr>
-              <a:t>AЖ · ЗАТК Слід/Тест · MDM · MS 365</a:t>
+              <a:t>Zabbix · ІКС Delta · СПЗ ВIРAЖ · ЗАТК Слід/Тест · MDM · MS 365</a:t>
             </a:r>
             <a:endParaRPr lang="en-US" sz="1100" dirty="0"/>
           </a:p>
@@ -5931,7 +6676,7 @@
         <p:spPr>
           <a:xfrm>
             <a:off x="502920" y="292608"/>
-            <a:ext cx="8229600" cy="502920"/>
+            <a:ext cx="6035040" cy="502920"/>
           </a:xfrm>
           <a:prstGeom prst="rect">
             <a:avLst/>
@@ -5955,7 +6700,7 @@
                 <a:ea typeface="Calibri" pitchFamily="34" charset="-122"/>
                 <a:cs typeface="Calibri" pitchFamily="34" charset="-120"/>
               </a:rPr>
-              <a:t>Сертифікати — 21 курс (2026)</a:t>
+              <a:t>Сертифікати — 26 документів (2026)</a:t>
             </a:r>
             <a:endParaRPr lang="en-US" sz="3000" dirty="0"/>
           </a:p>
@@ -5969,12 +6714,73 @@
         </p:nvSpPr>
         <p:spPr>
           <a:xfrm>
-            <a:off x="502920" y="960120"/>
-            <a:ext cx="5212080" cy="3794760"/>
+            <a:off x="6400800" y="347472"/>
+            <a:ext cx="2240280" cy="402336"/>
           </a:xfrm>
           <a:prstGeom prst="roundRect">
             <a:avLst>
-              <a:gd name="adj" fmla="val 1446"/>
+              <a:gd name="adj" fmla="val 50000"/>
+            </a:avLst>
+          </a:prstGeom>
+          <a:solidFill>
+            <a:srgbClr val="B08D3A"/>
+          </a:solidFill>
+          <a:ln/>
+        </p:spPr>
+      </p:sp>
+      <p:sp>
+        <p:nvSpPr>
+          <p:cNvPr id="4" name="Text 2"/>
+          <p:cNvSpPr/>
+          <p:nvPr/>
+        </p:nvSpPr>
+        <p:spPr>
+          <a:xfrm>
+            <a:off x="6400800" y="347472"/>
+            <a:ext cx="2240280" cy="402336"/>
+          </a:xfrm>
+          <a:prstGeom prst="rect">
+            <a:avLst/>
+          </a:prstGeom>
+          <a:noFill/>
+          <a:ln/>
+        </p:spPr>
+        <p:txBody>
+          <a:bodyPr wrap="square" rtlCol="0" anchor="ctr"/>
+          <a:lstStyle/>
+          <a:p>
+            <a:pPr marL="0" indent="0" algn="ctr">
+              <a:buNone/>
+            </a:pPr>
+            <a:r>
+              <a:rPr lang="en-US" sz="1150" b="1" dirty="0">
+                <a:solidFill>
+                  <a:srgbClr val="FFFFFF"/>
+                </a:solidFill>
+                <a:latin typeface="Calibri" pitchFamily="34" charset="0"/>
+                <a:ea typeface="Calibri" pitchFamily="34" charset="-122"/>
+                <a:cs typeface="Calibri" pitchFamily="34" charset="-120"/>
+              </a:rPr>
+              <a:t>+ ВОС-403 · телекомунікації</a:t>
+            </a:r>
+            <a:endParaRPr lang="en-US" sz="1150" dirty="0"/>
+          </a:p>
+        </p:txBody>
+      </p:sp>
+      <p:sp>
+        <p:nvSpPr>
+          <p:cNvPr id="5" name="Shape 3"/>
+          <p:cNvSpPr/>
+          <p:nvPr/>
+        </p:nvSpPr>
+        <p:spPr>
+          <a:xfrm>
+            <a:off x="502920" y="932688"/>
+            <a:ext cx="4572000" cy="3886200"/>
+          </a:xfrm>
+          <a:prstGeom prst="roundRect">
+            <a:avLst>
+              <a:gd name="adj" fmla="val 1412"/>
             </a:avLst>
           </a:prstGeom>
           <a:solidFill>
@@ -5992,14 +6798,14 @@
       </p:sp>
       <p:sp>
         <p:nvSpPr>
-          <p:cNvPr id="4" name="Shape 2"/>
-          <p:cNvSpPr/>
-          <p:nvPr/>
-        </p:nvSpPr>
-        <p:spPr>
-          <a:xfrm>
-            <a:off x="731520" y="1170432"/>
-            <a:ext cx="457200" cy="457200"/>
+          <p:cNvPr id="6" name="Shape 4"/>
+          <p:cNvSpPr/>
+          <p:nvPr/>
+        </p:nvSpPr>
+        <p:spPr>
+          <a:xfrm>
+            <a:off x="713232" y="1115568"/>
+            <a:ext cx="420624" cy="420624"/>
           </a:xfrm>
           <a:prstGeom prst="ellipse">
             <a:avLst/>
@@ -6012,7 +6818,7 @@
       </p:sp>
       <p:pic>
         <p:nvPicPr>
-          <p:cNvPr id="5" name="Image 0" descr="preencoded.png"/>
+          <p:cNvPr id="7" name="Image 0" descr="preencoded.png"/>
           <p:cNvPicPr>
             <a:picLocks noChangeAspect="1"/>
           </p:cNvPicPr>
@@ -6026,8 +6832,8 @@
         </p:blipFill>
         <p:spPr>
           <a:xfrm>
-            <a:off x="794084" y="1232996"/>
-            <a:ext cx="338328" cy="338328"/>
+            <a:off x="770791" y="1173127"/>
+            <a:ext cx="311262" cy="311262"/>
           </a:xfrm>
           <a:prstGeom prst="rect">
             <a:avLst/>
@@ -6036,14 +6842,14 @@
       </p:pic>
       <p:sp>
         <p:nvSpPr>
-          <p:cNvPr id="6" name="Text 3"/>
-          <p:cNvSpPr/>
-          <p:nvPr/>
-        </p:nvSpPr>
-        <p:spPr>
-          <a:xfrm>
-            <a:off x="1325880" y="1188720"/>
-            <a:ext cx="4206240" cy="457200"/>
+          <p:cNvPr id="8" name="Text 5"/>
+          <p:cNvSpPr/>
+          <p:nvPr/>
+        </p:nvSpPr>
+        <p:spPr>
+          <a:xfrm>
+            <a:off x="1261872" y="1133856"/>
+            <a:ext cx="3657600" cy="402336"/>
           </a:xfrm>
           <a:prstGeom prst="rect">
             <a:avLst/>
@@ -6059,7 +6865,7 @@
               <a:buNone/>
             </a:pPr>
             <a:r>
-              <a:rPr lang="en-US" sz="1550" b="1" dirty="0">
+              <a:rPr lang="en-US" sz="1500" b="1" dirty="0">
                 <a:solidFill>
                   <a:srgbClr val="24281F"/>
                 </a:solidFill>
@@ -6067,22 +6873,22 @@
                 <a:ea typeface="Calibri" pitchFamily="34" charset="-122"/>
                 <a:cs typeface="Calibri" pitchFamily="34" charset="-120"/>
               </a:rPr>
-              <a:t>Військові курси — 15 сертифікатів</a:t>
-            </a:r>
-            <a:endParaRPr lang="en-US" sz="1550" dirty="0"/>
-          </a:p>
-        </p:txBody>
-      </p:sp>
-      <p:sp>
-        <p:nvSpPr>
-          <p:cNvPr id="7" name="Text 4"/>
-          <p:cNvSpPr/>
-          <p:nvPr/>
-        </p:nvSpPr>
-        <p:spPr>
-          <a:xfrm>
-            <a:off x="731520" y="1828800"/>
-            <a:ext cx="1920240" cy="502920"/>
+              <a:t>Військові курси — 15</a:t>
+            </a:r>
+            <a:endParaRPr lang="en-US" sz="1500" dirty="0"/>
+          </a:p>
+        </p:txBody>
+      </p:sp>
+      <p:sp>
+        <p:nvSpPr>
+          <p:cNvPr id="9" name="Text 6"/>
+          <p:cNvSpPr/>
+          <p:nvPr/>
+        </p:nvSpPr>
+        <p:spPr>
+          <a:xfrm>
+            <a:off x="713232" y="1700784"/>
+            <a:ext cx="1691640" cy="548640"/>
           </a:xfrm>
           <a:prstGeom prst="rect">
             <a:avLst/>
@@ -6098,7 +6904,7 @@
               <a:buNone/>
             </a:pPr>
             <a:r>
-              <a:rPr lang="en-US" sz="1150" b="1" dirty="0">
+              <a:rPr lang="en-US" sz="1100" b="1" dirty="0">
                 <a:solidFill>
                   <a:srgbClr val="B08D3A"/>
                 </a:solidFill>
@@ -6108,20 +6914,20 @@
               </a:rPr>
               <a:t>Цифрові системи ЗСУ</a:t>
             </a:r>
-            <a:endParaRPr lang="en-US" sz="1150" dirty="0"/>
-          </a:p>
-        </p:txBody>
-      </p:sp>
-      <p:sp>
-        <p:nvSpPr>
-          <p:cNvPr id="8" name="Text 5"/>
-          <p:cNvSpPr/>
-          <p:nvPr/>
-        </p:nvSpPr>
-        <p:spPr>
-          <a:xfrm>
-            <a:off x="2697480" y="1828800"/>
-            <a:ext cx="2880360" cy="502920"/>
+            <a:endParaRPr lang="en-US" sz="1100" dirty="0"/>
+          </a:p>
+        </p:txBody>
+      </p:sp>
+      <p:sp>
+        <p:nvSpPr>
+          <p:cNvPr id="10" name="Text 7"/>
+          <p:cNvSpPr/>
+          <p:nvPr/>
+        </p:nvSpPr>
+        <p:spPr>
+          <a:xfrm>
+            <a:off x="2450592" y="1700784"/>
+            <a:ext cx="2487168" cy="548640"/>
           </a:xfrm>
           <a:prstGeom prst="rect">
             <a:avLst/>
@@ -6137,7 +6943,7 @@
               <a:buNone/>
             </a:pPr>
             <a:r>
-              <a:rPr lang="en-US" sz="1050" dirty="0">
+              <a:rPr lang="en-US" sz="1000" dirty="0">
                 <a:solidFill>
                   <a:srgbClr val="24281F"/>
                 </a:solidFill>
@@ -6147,20 +6953,20 @@
               </a:rPr>
               <a:t>DELTA · СЕДО · DOT-Chain · Цифрова трансформація</a:t>
             </a:r>
-            <a:endParaRPr lang="en-US" sz="1050" dirty="0"/>
-          </a:p>
-        </p:txBody>
-      </p:sp>
-      <p:sp>
-        <p:nvSpPr>
-          <p:cNvPr id="9" name="Text 6"/>
-          <p:cNvSpPr/>
-          <p:nvPr/>
-        </p:nvSpPr>
-        <p:spPr>
-          <a:xfrm>
-            <a:off x="731520" y="2395728"/>
-            <a:ext cx="1920240" cy="502920"/>
+            <a:endParaRPr lang="en-US" sz="1000" dirty="0"/>
+          </a:p>
+        </p:txBody>
+      </p:sp>
+      <p:sp>
+        <p:nvSpPr>
+          <p:cNvPr id="11" name="Text 8"/>
+          <p:cNvSpPr/>
+          <p:nvPr/>
+        </p:nvSpPr>
+        <p:spPr>
+          <a:xfrm>
+            <a:off x="713232" y="2304288"/>
+            <a:ext cx="1691640" cy="548640"/>
           </a:xfrm>
           <a:prstGeom prst="rect">
             <a:avLst/>
@@ -6176,7 +6982,7 @@
               <a:buNone/>
             </a:pPr>
             <a:r>
-              <a:rPr lang="en-US" sz="1150" b="1" dirty="0">
+              <a:rPr lang="en-US" sz="1100" b="1" dirty="0">
                 <a:solidFill>
                   <a:srgbClr val="B08D3A"/>
                 </a:solidFill>
@@ -6186,20 +6992,20 @@
               </a:rPr>
               <a:t>Зв'язок та РЕБ</a:t>
             </a:r>
-            <a:endParaRPr lang="en-US" sz="1150" dirty="0"/>
-          </a:p>
-        </p:txBody>
-      </p:sp>
-      <p:sp>
-        <p:nvSpPr>
-          <p:cNvPr id="10" name="Text 7"/>
-          <p:cNvSpPr/>
-          <p:nvPr/>
-        </p:nvSpPr>
-        <p:spPr>
-          <a:xfrm>
-            <a:off x="2697480" y="2395728"/>
-            <a:ext cx="2880360" cy="502920"/>
+            <a:endParaRPr lang="en-US" sz="1100" dirty="0"/>
+          </a:p>
+        </p:txBody>
+      </p:sp>
+      <p:sp>
+        <p:nvSpPr>
+          <p:cNvPr id="12" name="Text 9"/>
+          <p:cNvSpPr/>
+          <p:nvPr/>
+        </p:nvSpPr>
+        <p:spPr>
+          <a:xfrm>
+            <a:off x="2450592" y="2304288"/>
+            <a:ext cx="2487168" cy="548640"/>
           </a:xfrm>
           <a:prstGeom prst="rect">
             <a:avLst/>
@@ -6215,7 +7021,7 @@
               <a:buNone/>
             </a:pPr>
             <a:r>
-              <a:rPr lang="en-US" sz="1050" dirty="0">
+              <a:rPr lang="en-US" sz="1000" dirty="0">
                 <a:solidFill>
                   <a:srgbClr val="24281F"/>
                 </a:solidFill>
@@ -6225,20 +7031,20 @@
               </a:rPr>
               <a:t>Основи зв'язку на полі бою · Основи РЕБ · ГРАФІТ (БпЛА)</a:t>
             </a:r>
-            <a:endParaRPr lang="en-US" sz="1050" dirty="0"/>
-          </a:p>
-        </p:txBody>
-      </p:sp>
-      <p:sp>
-        <p:nvSpPr>
-          <p:cNvPr id="11" name="Text 8"/>
-          <p:cNvSpPr/>
-          <p:nvPr/>
-        </p:nvSpPr>
-        <p:spPr>
-          <a:xfrm>
-            <a:off x="731520" y="2962656"/>
-            <a:ext cx="1920240" cy="502920"/>
+            <a:endParaRPr lang="en-US" sz="1000" dirty="0"/>
+          </a:p>
+        </p:txBody>
+      </p:sp>
+      <p:sp>
+        <p:nvSpPr>
+          <p:cNvPr id="13" name="Text 10"/>
+          <p:cNvSpPr/>
+          <p:nvPr/>
+        </p:nvSpPr>
+        <p:spPr>
+          <a:xfrm>
+            <a:off x="713232" y="2907792"/>
+            <a:ext cx="1691640" cy="548640"/>
           </a:xfrm>
           <a:prstGeom prst="rect">
             <a:avLst/>
@@ -6254,7 +7060,7 @@
               <a:buNone/>
             </a:pPr>
             <a:r>
-              <a:rPr lang="en-US" sz="1150" b="1" dirty="0">
+              <a:rPr lang="en-US" sz="1100" b="1" dirty="0">
                 <a:solidFill>
                   <a:srgbClr val="B08D3A"/>
                 </a:solidFill>
@@ -6264,20 +7070,20 @@
               </a:rPr>
               <a:t>Кібербезпека</a:t>
             </a:r>
-            <a:endParaRPr lang="en-US" sz="1150" dirty="0"/>
-          </a:p>
-        </p:txBody>
-      </p:sp>
-      <p:sp>
-        <p:nvSpPr>
-          <p:cNvPr id="12" name="Text 9"/>
-          <p:cNvSpPr/>
-          <p:nvPr/>
-        </p:nvSpPr>
-        <p:spPr>
-          <a:xfrm>
-            <a:off x="2697480" y="2962656"/>
-            <a:ext cx="2880360" cy="502920"/>
+            <a:endParaRPr lang="en-US" sz="1100" dirty="0"/>
+          </a:p>
+        </p:txBody>
+      </p:sp>
+      <p:sp>
+        <p:nvSpPr>
+          <p:cNvPr id="14" name="Text 11"/>
+          <p:cNvSpPr/>
+          <p:nvPr/>
+        </p:nvSpPr>
+        <p:spPr>
+          <a:xfrm>
+            <a:off x="2450592" y="2907792"/>
+            <a:ext cx="2487168" cy="548640"/>
           </a:xfrm>
           <a:prstGeom prst="rect">
             <a:avLst/>
@@ -6293,7 +7099,7 @@
               <a:buNone/>
             </a:pPr>
             <a:r>
-              <a:rPr lang="en-US" sz="1050" dirty="0">
+              <a:rPr lang="en-US" sz="1000" dirty="0">
                 <a:solidFill>
                   <a:srgbClr val="24281F"/>
                 </a:solidFill>
@@ -6303,20 +7109,20 @@
               </a:rPr>
               <a:t>Кібергігієна 2.0 · Кібербезпека · Протидія ІПСО</a:t>
             </a:r>
-            <a:endParaRPr lang="en-US" sz="1050" dirty="0"/>
-          </a:p>
-        </p:txBody>
-      </p:sp>
-      <p:sp>
-        <p:nvSpPr>
-          <p:cNvPr id="13" name="Text 10"/>
-          <p:cNvSpPr/>
-          <p:nvPr/>
-        </p:nvSpPr>
-        <p:spPr>
-          <a:xfrm>
-            <a:off x="731520" y="3529584"/>
-            <a:ext cx="1920240" cy="502920"/>
+            <a:endParaRPr lang="en-US" sz="1000" dirty="0"/>
+          </a:p>
+        </p:txBody>
+      </p:sp>
+      <p:sp>
+        <p:nvSpPr>
+          <p:cNvPr id="15" name="Text 12"/>
+          <p:cNvSpPr/>
+          <p:nvPr/>
+        </p:nvSpPr>
+        <p:spPr>
+          <a:xfrm>
+            <a:off x="713232" y="3511296"/>
+            <a:ext cx="1691640" cy="548640"/>
           </a:xfrm>
           <a:prstGeom prst="rect">
             <a:avLst/>
@@ -6332,7 +7138,7 @@
               <a:buNone/>
             </a:pPr>
             <a:r>
-              <a:rPr lang="en-US" sz="1150" b="1" dirty="0">
+              <a:rPr lang="en-US" sz="1100" b="1" dirty="0">
                 <a:solidFill>
                   <a:srgbClr val="B08D3A"/>
                 </a:solidFill>
@@ -6342,20 +7148,20 @@
               </a:rPr>
               <a:t>Новітні технології</a:t>
             </a:r>
-            <a:endParaRPr lang="en-US" sz="1150" dirty="0"/>
-          </a:p>
-        </p:txBody>
-      </p:sp>
-      <p:sp>
-        <p:nvSpPr>
-          <p:cNvPr id="14" name="Text 11"/>
-          <p:cNvSpPr/>
-          <p:nvPr/>
-        </p:nvSpPr>
-        <p:spPr>
-          <a:xfrm>
-            <a:off x="2697480" y="3529584"/>
-            <a:ext cx="2880360" cy="502920"/>
+            <a:endParaRPr lang="en-US" sz="1100" dirty="0"/>
+          </a:p>
+        </p:txBody>
+      </p:sp>
+      <p:sp>
+        <p:nvSpPr>
+          <p:cNvPr id="16" name="Text 13"/>
+          <p:cNvSpPr/>
+          <p:nvPr/>
+        </p:nvSpPr>
+        <p:spPr>
+          <a:xfrm>
+            <a:off x="2450592" y="3511296"/>
+            <a:ext cx="2487168" cy="548640"/>
           </a:xfrm>
           <a:prstGeom prst="rect">
             <a:avLst/>
@@ -6371,7 +7177,7 @@
               <a:buNone/>
             </a:pPr>
             <a:r>
-              <a:rPr lang="en-US" sz="1050" dirty="0">
+              <a:rPr lang="en-US" sz="1000" dirty="0">
                 <a:solidFill>
                   <a:srgbClr val="24281F"/>
                 </a:solidFill>
@@ -6381,20 +7187,20 @@
               </a:rPr>
               <a:t>Дрони на оптоволокні · Наземні роботизовані комплекси</a:t>
             </a:r>
-            <a:endParaRPr lang="en-US" sz="1050" dirty="0"/>
-          </a:p>
-        </p:txBody>
-      </p:sp>
-      <p:sp>
-        <p:nvSpPr>
-          <p:cNvPr id="15" name="Text 12"/>
-          <p:cNvSpPr/>
-          <p:nvPr/>
-        </p:nvSpPr>
-        <p:spPr>
-          <a:xfrm>
-            <a:off x="731520" y="4096512"/>
-            <a:ext cx="1920240" cy="502920"/>
+            <a:endParaRPr lang="en-US" sz="1000" dirty="0"/>
+          </a:p>
+        </p:txBody>
+      </p:sp>
+      <p:sp>
+        <p:nvSpPr>
+          <p:cNvPr id="17" name="Text 14"/>
+          <p:cNvSpPr/>
+          <p:nvPr/>
+        </p:nvSpPr>
+        <p:spPr>
+          <a:xfrm>
+            <a:off x="713232" y="4114800"/>
+            <a:ext cx="1691640" cy="548640"/>
           </a:xfrm>
           <a:prstGeom prst="rect">
             <a:avLst/>
@@ -6410,7 +7216,7 @@
               <a:buNone/>
             </a:pPr>
             <a:r>
-              <a:rPr lang="en-US" sz="1150" b="1" dirty="0">
+              <a:rPr lang="en-US" sz="1100" b="1" dirty="0">
                 <a:solidFill>
                   <a:srgbClr val="B08D3A"/>
                 </a:solidFill>
@@ -6420,20 +7226,20 @@
               </a:rPr>
               <a:t>Загальновійськові</a:t>
             </a:r>
-            <a:endParaRPr lang="en-US" sz="1150" dirty="0"/>
-          </a:p>
-        </p:txBody>
-      </p:sp>
-      <p:sp>
-        <p:nvSpPr>
-          <p:cNvPr id="16" name="Text 13"/>
-          <p:cNvSpPr/>
-          <p:nvPr/>
-        </p:nvSpPr>
-        <p:spPr>
-          <a:xfrm>
-            <a:off x="2697480" y="4096512"/>
-            <a:ext cx="2880360" cy="502920"/>
+            <a:endParaRPr lang="en-US" sz="1100" dirty="0"/>
+          </a:p>
+        </p:txBody>
+      </p:sp>
+      <p:sp>
+        <p:nvSpPr>
+          <p:cNvPr id="18" name="Text 15"/>
+          <p:cNvSpPr/>
+          <p:nvPr/>
+        </p:nvSpPr>
+        <p:spPr>
+          <a:xfrm>
+            <a:off x="2450592" y="4114800"/>
+            <a:ext cx="2487168" cy="548640"/>
           </a:xfrm>
           <a:prstGeom prst="rect">
             <a:avLst/>
@@ -6449,7 +7255,7 @@
               <a:buNone/>
             </a:pPr>
             <a:r>
-              <a:rPr lang="en-US" sz="1050" dirty="0">
+              <a:rPr lang="en-US" sz="1000" dirty="0">
                 <a:solidFill>
                   <a:srgbClr val="24281F"/>
                 </a:solidFill>
@@ -6457,26 +7263,26 @@
                 <a:ea typeface="Calibri" pitchFamily="34" charset="-122"/>
                 <a:cs typeface="Calibri" pitchFamily="34" charset="-120"/>
               </a:rPr>
-              <a:t>Тактична медицина · Психологічна підготовка · Фінансова грамотність</a:t>
-            </a:r>
-            <a:endParaRPr lang="en-US" sz="1050" dirty="0"/>
-          </a:p>
-        </p:txBody>
-      </p:sp>
-      <p:sp>
-        <p:nvSpPr>
-          <p:cNvPr id="17" name="Shape 14"/>
-          <p:cNvSpPr/>
-          <p:nvPr/>
-        </p:nvSpPr>
-        <p:spPr>
-          <a:xfrm>
-            <a:off x="5897880" y="960120"/>
-            <a:ext cx="2743200" cy="3794760"/>
+              <a:t>Тактична медицина · Психологія · Фінансова грамотність</a:t>
+            </a:r>
+            <a:endParaRPr lang="en-US" sz="1000" dirty="0"/>
+          </a:p>
+        </p:txBody>
+      </p:sp>
+      <p:sp>
+        <p:nvSpPr>
+          <p:cNvPr id="19" name="Shape 16"/>
+          <p:cNvSpPr/>
+          <p:nvPr/>
+        </p:nvSpPr>
+        <p:spPr>
+          <a:xfrm>
+            <a:off x="5257800" y="932688"/>
+            <a:ext cx="3383280" cy="3886200"/>
           </a:xfrm>
           <a:prstGeom prst="roundRect">
             <a:avLst>
-              <a:gd name="adj" fmla="val 2000"/>
+              <a:gd name="adj" fmla="val 1622"/>
             </a:avLst>
           </a:prstGeom>
           <a:solidFill>
@@ -6494,14 +7300,14 @@
       </p:sp>
       <p:sp>
         <p:nvSpPr>
-          <p:cNvPr id="18" name="Shape 15"/>
-          <p:cNvSpPr/>
-          <p:nvPr/>
-        </p:nvSpPr>
-        <p:spPr>
-          <a:xfrm>
-            <a:off x="6108192" y="1170432"/>
-            <a:ext cx="457200" cy="457200"/>
+          <p:cNvPr id="20" name="Shape 17"/>
+          <p:cNvSpPr/>
+          <p:nvPr/>
+        </p:nvSpPr>
+        <p:spPr>
+          <a:xfrm>
+            <a:off x="5468112" y="1115568"/>
+            <a:ext cx="420624" cy="420624"/>
           </a:xfrm>
           <a:prstGeom prst="ellipse">
             <a:avLst/>
@@ -6514,7 +7320,7 @@
       </p:sp>
       <p:pic>
         <p:nvPicPr>
-          <p:cNvPr id="19" name="Image 1" descr="preencoded.png"/>
+          <p:cNvPr id="21" name="Image 1" descr="preencoded.png"/>
           <p:cNvPicPr>
             <a:picLocks noChangeAspect="1"/>
           </p:cNvPicPr>
@@ -6528,8 +7334,8 @@
         </p:blipFill>
         <p:spPr>
           <a:xfrm>
-            <a:off x="6170756" y="1232996"/>
-            <a:ext cx="338328" cy="338328"/>
+            <a:off x="5525671" y="1173127"/>
+            <a:ext cx="311262" cy="311262"/>
           </a:xfrm>
           <a:prstGeom prst="rect">
             <a:avLst/>
@@ -6538,14 +7344,14 @@
       </p:pic>
       <p:sp>
         <p:nvSpPr>
-          <p:cNvPr id="20" name="Text 16"/>
-          <p:cNvSpPr/>
-          <p:nvPr/>
-        </p:nvSpPr>
-        <p:spPr>
-          <a:xfrm>
-            <a:off x="6675120" y="1188720"/>
-            <a:ext cx="1828800" cy="457200"/>
+          <p:cNvPr id="22" name="Text 18"/>
+          <p:cNvSpPr/>
+          <p:nvPr/>
+        </p:nvSpPr>
+        <p:spPr>
+          <a:xfrm>
+            <a:off x="5998464" y="1133856"/>
+            <a:ext cx="2468880" cy="402336"/>
           </a:xfrm>
           <a:prstGeom prst="rect">
             <a:avLst/>
@@ -6569,7 +7375,7 @@
                 <a:ea typeface="Calibri" pitchFamily="34" charset="-122"/>
                 <a:cs typeface="Calibri" pitchFamily="34" charset="-120"/>
               </a:rPr>
-              <a:t>ОСВІТА Дія — 6</a:t>
+              <a:t>ОСВІТА Дія — 10</a:t>
             </a:r>
             <a:endParaRPr lang="en-US" sz="1500" dirty="0"/>
           </a:p>
@@ -6577,14 +7383,14 @@
       </p:sp>
       <p:sp>
         <p:nvSpPr>
-          <p:cNvPr id="21" name="Shape 17"/>
-          <p:cNvSpPr/>
-          <p:nvPr/>
-        </p:nvSpPr>
-        <p:spPr>
-          <a:xfrm>
-            <a:off x="6144768" y="1892808"/>
-            <a:ext cx="82296" cy="82296"/>
+          <p:cNvPr id="23" name="Shape 19"/>
+          <p:cNvSpPr/>
+          <p:nvPr/>
+        </p:nvSpPr>
+        <p:spPr>
+          <a:xfrm>
+            <a:off x="5486400" y="1773936"/>
+            <a:ext cx="73152" cy="73152"/>
           </a:xfrm>
           <a:prstGeom prst="ellipse">
             <a:avLst/>
@@ -6597,14 +7403,14 @@
       </p:sp>
       <p:sp>
         <p:nvSpPr>
-          <p:cNvPr id="22" name="Text 18"/>
-          <p:cNvSpPr/>
-          <p:nvPr/>
-        </p:nvSpPr>
-        <p:spPr>
-          <a:xfrm>
-            <a:off x="6355080" y="1783080"/>
-            <a:ext cx="2194560" cy="457200"/>
+          <p:cNvPr id="24" name="Text 20"/>
+          <p:cNvSpPr/>
+          <p:nvPr/>
+        </p:nvSpPr>
+        <p:spPr>
+          <a:xfrm>
+            <a:off x="5669280" y="1673352"/>
+            <a:ext cx="2880360" cy="310896"/>
           </a:xfrm>
           <a:prstGeom prst="rect">
             <a:avLst/>
@@ -6620,7 +7426,7 @@
               <a:buNone/>
             </a:pPr>
             <a:r>
-              <a:rPr lang="en-US" sz="1050" dirty="0">
+              <a:rPr lang="en-US" sz="950" dirty="0">
                 <a:solidFill>
                   <a:srgbClr val="E8E6DB"/>
                 </a:solidFill>
@@ -6630,20 +7436,20 @@
               </a:rPr>
               <a:t>Датааналітик: Вступ до Excel</a:t>
             </a:r>
-            <a:endParaRPr lang="en-US" sz="1050" dirty="0"/>
-          </a:p>
-        </p:txBody>
-      </p:sp>
-      <p:sp>
-        <p:nvSpPr>
-          <p:cNvPr id="23" name="Shape 19"/>
-          <p:cNvSpPr/>
-          <p:nvPr/>
-        </p:nvSpPr>
-        <p:spPr>
-          <a:xfrm>
-            <a:off x="6144768" y="2368296"/>
-            <a:ext cx="82296" cy="82296"/>
+            <a:endParaRPr lang="en-US" sz="950" dirty="0"/>
+          </a:p>
+        </p:txBody>
+      </p:sp>
+      <p:sp>
+        <p:nvSpPr>
+          <p:cNvPr id="25" name="Shape 21"/>
+          <p:cNvSpPr/>
+          <p:nvPr/>
+        </p:nvSpPr>
+        <p:spPr>
+          <a:xfrm>
+            <a:off x="5486400" y="2080260"/>
+            <a:ext cx="73152" cy="73152"/>
           </a:xfrm>
           <a:prstGeom prst="ellipse">
             <a:avLst/>
@@ -6656,14 +7462,14 @@
       </p:sp>
       <p:sp>
         <p:nvSpPr>
-          <p:cNvPr id="24" name="Text 20"/>
-          <p:cNvSpPr/>
-          <p:nvPr/>
-        </p:nvSpPr>
-        <p:spPr>
-          <a:xfrm>
-            <a:off x="6355080" y="2258568"/>
-            <a:ext cx="2194560" cy="457200"/>
+          <p:cNvPr id="26" name="Text 22"/>
+          <p:cNvSpPr/>
+          <p:nvPr/>
+        </p:nvSpPr>
+        <p:spPr>
+          <a:xfrm>
+            <a:off x="5669280" y="1979676"/>
+            <a:ext cx="2880360" cy="310896"/>
           </a:xfrm>
           <a:prstGeom prst="rect">
             <a:avLst/>
@@ -6679,7 +7485,7 @@
               <a:buNone/>
             </a:pPr>
             <a:r>
-              <a:rPr lang="en-US" sz="1050" dirty="0">
+              <a:rPr lang="en-US" sz="950" dirty="0">
                 <a:solidFill>
                   <a:srgbClr val="E8E6DB"/>
                 </a:solidFill>
@@ -6689,20 +7495,20 @@
               </a:rPr>
               <a:t>Датааналітик: SQL та Power BI</a:t>
             </a:r>
-            <a:endParaRPr lang="en-US" sz="1050" dirty="0"/>
-          </a:p>
-        </p:txBody>
-      </p:sp>
-      <p:sp>
-        <p:nvSpPr>
-          <p:cNvPr id="25" name="Shape 21"/>
-          <p:cNvSpPr/>
-          <p:nvPr/>
-        </p:nvSpPr>
-        <p:spPr>
-          <a:xfrm>
-            <a:off x="6144768" y="2843784"/>
-            <a:ext cx="82296" cy="82296"/>
+            <a:endParaRPr lang="en-US" sz="950" dirty="0"/>
+          </a:p>
+        </p:txBody>
+      </p:sp>
+      <p:sp>
+        <p:nvSpPr>
+          <p:cNvPr id="27" name="Shape 23"/>
+          <p:cNvSpPr/>
+          <p:nvPr/>
+        </p:nvSpPr>
+        <p:spPr>
+          <a:xfrm>
+            <a:off x="5486400" y="2386584"/>
+            <a:ext cx="73152" cy="73152"/>
           </a:xfrm>
           <a:prstGeom prst="ellipse">
             <a:avLst/>
@@ -6715,14 +7521,14 @@
       </p:sp>
       <p:sp>
         <p:nvSpPr>
-          <p:cNvPr id="26" name="Text 22"/>
-          <p:cNvSpPr/>
-          <p:nvPr/>
-        </p:nvSpPr>
-        <p:spPr>
-          <a:xfrm>
-            <a:off x="6355080" y="2734056"/>
-            <a:ext cx="2194560" cy="457200"/>
+          <p:cNvPr id="28" name="Text 24"/>
+          <p:cNvSpPr/>
+          <p:nvPr/>
+        </p:nvSpPr>
+        <p:spPr>
+          <a:xfrm>
+            <a:off x="5669280" y="2286000"/>
+            <a:ext cx="2880360" cy="310896"/>
           </a:xfrm>
           <a:prstGeom prst="rect">
             <a:avLst/>
@@ -6738,7 +7544,7 @@
               <a:buNone/>
             </a:pPr>
             <a:r>
-              <a:rPr lang="en-US" sz="1050" dirty="0">
+              <a:rPr lang="en-US" sz="950" dirty="0">
                 <a:solidFill>
                   <a:srgbClr val="E8E6DB"/>
                 </a:solidFill>
@@ -6748,20 +7554,20 @@
               </a:rPr>
               <a:t>Штучний інтелект (ШІ)</a:t>
             </a:r>
-            <a:endParaRPr lang="en-US" sz="1050" dirty="0"/>
-          </a:p>
-        </p:txBody>
-      </p:sp>
-      <p:sp>
-        <p:nvSpPr>
-          <p:cNvPr id="27" name="Shape 23"/>
-          <p:cNvSpPr/>
-          <p:nvPr/>
-        </p:nvSpPr>
-        <p:spPr>
-          <a:xfrm>
-            <a:off x="6144768" y="3319272"/>
-            <a:ext cx="82296" cy="82296"/>
+            <a:endParaRPr lang="en-US" sz="950" dirty="0"/>
+          </a:p>
+        </p:txBody>
+      </p:sp>
+      <p:sp>
+        <p:nvSpPr>
+          <p:cNvPr id="29" name="Shape 25"/>
+          <p:cNvSpPr/>
+          <p:nvPr/>
+        </p:nvSpPr>
+        <p:spPr>
+          <a:xfrm>
+            <a:off x="5486400" y="2692908"/>
+            <a:ext cx="73152" cy="73152"/>
           </a:xfrm>
           <a:prstGeom prst="ellipse">
             <a:avLst/>
@@ -6774,14 +7580,14 @@
       </p:sp>
       <p:sp>
         <p:nvSpPr>
-          <p:cNvPr id="28" name="Text 24"/>
-          <p:cNvSpPr/>
-          <p:nvPr/>
-        </p:nvSpPr>
-        <p:spPr>
-          <a:xfrm>
-            <a:off x="6355080" y="3209544"/>
-            <a:ext cx="2194560" cy="457200"/>
+          <p:cNvPr id="30" name="Text 26"/>
+          <p:cNvSpPr/>
+          <p:nvPr/>
+        </p:nvSpPr>
+        <p:spPr>
+          <a:xfrm>
+            <a:off x="5669280" y="2592324"/>
+            <a:ext cx="2880360" cy="310896"/>
           </a:xfrm>
           <a:prstGeom prst="rect">
             <a:avLst/>
@@ -6797,7 +7603,7 @@
               <a:buNone/>
             </a:pPr>
             <a:r>
-              <a:rPr lang="en-US" sz="1050" dirty="0">
+              <a:rPr lang="en-US" sz="950" dirty="0">
                 <a:solidFill>
                   <a:srgbClr val="E8E6DB"/>
                 </a:solidFill>
@@ -6807,20 +7613,20 @@
               </a:rPr>
               <a:t>Інженер із комп'ютерних систем і мереж</a:t>
             </a:r>
-            <a:endParaRPr lang="en-US" sz="1050" dirty="0"/>
-          </a:p>
-        </p:txBody>
-      </p:sp>
-      <p:sp>
-        <p:nvSpPr>
-          <p:cNvPr id="29" name="Shape 25"/>
-          <p:cNvSpPr/>
-          <p:nvPr/>
-        </p:nvSpPr>
-        <p:spPr>
-          <a:xfrm>
-            <a:off x="6144768" y="3794760"/>
-            <a:ext cx="82296" cy="82296"/>
+            <a:endParaRPr lang="en-US" sz="950" dirty="0"/>
+          </a:p>
+        </p:txBody>
+      </p:sp>
+      <p:sp>
+        <p:nvSpPr>
+          <p:cNvPr id="31" name="Shape 27"/>
+          <p:cNvSpPr/>
+          <p:nvPr/>
+        </p:nvSpPr>
+        <p:spPr>
+          <a:xfrm>
+            <a:off x="5486400" y="2999232"/>
+            <a:ext cx="73152" cy="73152"/>
           </a:xfrm>
           <a:prstGeom prst="ellipse">
             <a:avLst/>
@@ -6833,14 +7639,14 @@
       </p:sp>
       <p:sp>
         <p:nvSpPr>
-          <p:cNvPr id="30" name="Text 26"/>
-          <p:cNvSpPr/>
-          <p:nvPr/>
-        </p:nvSpPr>
-        <p:spPr>
-          <a:xfrm>
-            <a:off x="6355080" y="3685032"/>
-            <a:ext cx="2194560" cy="457200"/>
+          <p:cNvPr id="32" name="Text 28"/>
+          <p:cNvSpPr/>
+          <p:nvPr/>
+        </p:nvSpPr>
+        <p:spPr>
+          <a:xfrm>
+            <a:off x="5669280" y="2898648"/>
+            <a:ext cx="2880360" cy="310896"/>
           </a:xfrm>
           <a:prstGeom prst="rect">
             <a:avLst/>
@@ -6856,7 +7662,7 @@
               <a:buNone/>
             </a:pPr>
             <a:r>
-              <a:rPr lang="en-US" sz="1050" dirty="0">
+              <a:rPr lang="en-US" sz="950" dirty="0">
                 <a:solidFill>
                   <a:srgbClr val="E8E6DB"/>
                 </a:solidFill>
@@ -6866,20 +7672,20 @@
               </a:rPr>
               <a:t>Створення та розвиток ІТ-продуктів</a:t>
             </a:r>
-            <a:endParaRPr lang="en-US" sz="1050" dirty="0"/>
-          </a:p>
-        </p:txBody>
-      </p:sp>
-      <p:sp>
-        <p:nvSpPr>
-          <p:cNvPr id="31" name="Shape 27"/>
-          <p:cNvSpPr/>
-          <p:nvPr/>
-        </p:nvSpPr>
-        <p:spPr>
-          <a:xfrm>
-            <a:off x="6144768" y="4270248"/>
-            <a:ext cx="82296" cy="82296"/>
+            <a:endParaRPr lang="en-US" sz="950" dirty="0"/>
+          </a:p>
+        </p:txBody>
+      </p:sp>
+      <p:sp>
+        <p:nvSpPr>
+          <p:cNvPr id="33" name="Shape 29"/>
+          <p:cNvSpPr/>
+          <p:nvPr/>
+        </p:nvSpPr>
+        <p:spPr>
+          <a:xfrm>
+            <a:off x="5486400" y="3305556"/>
+            <a:ext cx="73152" cy="73152"/>
           </a:xfrm>
           <a:prstGeom prst="ellipse">
             <a:avLst/>
@@ -6892,14 +7698,14 @@
       </p:sp>
       <p:sp>
         <p:nvSpPr>
-          <p:cNvPr id="32" name="Text 28"/>
-          <p:cNvSpPr/>
-          <p:nvPr/>
-        </p:nvSpPr>
-        <p:spPr>
-          <a:xfrm>
-            <a:off x="6355080" y="4160520"/>
-            <a:ext cx="2194560" cy="457200"/>
+          <p:cNvPr id="34" name="Text 30"/>
+          <p:cNvSpPr/>
+          <p:nvPr/>
+        </p:nvSpPr>
+        <p:spPr>
+          <a:xfrm>
+            <a:off x="5669280" y="3204972"/>
+            <a:ext cx="2880360" cy="310896"/>
           </a:xfrm>
           <a:prstGeom prst="rect">
             <a:avLst/>
@@ -6915,7 +7721,7 @@
               <a:buNone/>
             </a:pPr>
             <a:r>
-              <a:rPr lang="en-US" sz="1050" dirty="0">
+              <a:rPr lang="en-US" sz="950" dirty="0">
                 <a:solidFill>
                   <a:srgbClr val="E8E6DB"/>
                 </a:solidFill>
@@ -6923,9 +7729,245 @@
                 <a:ea typeface="Calibri" pitchFamily="34" charset="-122"/>
                 <a:cs typeface="Calibri" pitchFamily="34" charset="-120"/>
               </a:rPr>
+              <a:t>Вступ до ІТ продакт-менеджменту</a:t>
+            </a:r>
+            <a:endParaRPr lang="en-US" sz="950" dirty="0"/>
+          </a:p>
+        </p:txBody>
+      </p:sp>
+      <p:sp>
+        <p:nvSpPr>
+          <p:cNvPr id="35" name="Shape 31"/>
+          <p:cNvSpPr/>
+          <p:nvPr/>
+        </p:nvSpPr>
+        <p:spPr>
+          <a:xfrm>
+            <a:off x="5486400" y="3611880"/>
+            <a:ext cx="73152" cy="73152"/>
+          </a:xfrm>
+          <a:prstGeom prst="ellipse">
+            <a:avLst/>
+          </a:prstGeom>
+          <a:solidFill>
+            <a:srgbClr val="B08D3A"/>
+          </a:solidFill>
+          <a:ln/>
+        </p:spPr>
+      </p:sp>
+      <p:sp>
+        <p:nvSpPr>
+          <p:cNvPr id="36" name="Text 32"/>
+          <p:cNvSpPr/>
+          <p:nvPr/>
+        </p:nvSpPr>
+        <p:spPr>
+          <a:xfrm>
+            <a:off x="5669280" y="3511296"/>
+            <a:ext cx="2880360" cy="310896"/>
+          </a:xfrm>
+          <a:prstGeom prst="rect">
+            <a:avLst/>
+          </a:prstGeom>
+          <a:noFill/>
+          <a:ln/>
+        </p:spPr>
+        <p:txBody>
+          <a:bodyPr wrap="square" rtlCol="0" anchor="t"/>
+          <a:lstStyle/>
+          <a:p>
+            <a:pPr marL="0" indent="0">
+              <a:buNone/>
+            </a:pPr>
+            <a:r>
+              <a:rPr lang="en-US" sz="950" dirty="0">
+                <a:solidFill>
+                  <a:srgbClr val="E8E6DB"/>
+                </a:solidFill>
+                <a:latin typeface="Calibri" pitchFamily="34" charset="0"/>
+                <a:ea typeface="Calibri" pitchFamily="34" charset="-122"/>
+                <a:cs typeface="Calibri" pitchFamily="34" charset="-120"/>
+              </a:rPr>
               <a:t>Цифровий бізнес</a:t>
             </a:r>
-            <a:endParaRPr lang="en-US" sz="1050" dirty="0"/>
+            <a:endParaRPr lang="en-US" sz="950" dirty="0"/>
+          </a:p>
+        </p:txBody>
+      </p:sp>
+      <p:sp>
+        <p:nvSpPr>
+          <p:cNvPr id="37" name="Shape 33"/>
+          <p:cNvSpPr/>
+          <p:nvPr/>
+        </p:nvSpPr>
+        <p:spPr>
+          <a:xfrm>
+            <a:off x="5486400" y="3918204"/>
+            <a:ext cx="73152" cy="73152"/>
+          </a:xfrm>
+          <a:prstGeom prst="ellipse">
+            <a:avLst/>
+          </a:prstGeom>
+          <a:solidFill>
+            <a:srgbClr val="B08D3A"/>
+          </a:solidFill>
+          <a:ln/>
+        </p:spPr>
+      </p:sp>
+      <p:sp>
+        <p:nvSpPr>
+          <p:cNvPr id="38" name="Text 34"/>
+          <p:cNvSpPr/>
+          <p:nvPr/>
+        </p:nvSpPr>
+        <p:spPr>
+          <a:xfrm>
+            <a:off x="5669280" y="3817620"/>
+            <a:ext cx="2880360" cy="310896"/>
+          </a:xfrm>
+          <a:prstGeom prst="rect">
+            <a:avLst/>
+          </a:prstGeom>
+          <a:noFill/>
+          <a:ln/>
+        </p:spPr>
+        <p:txBody>
+          <a:bodyPr wrap="square" rtlCol="0" anchor="t"/>
+          <a:lstStyle/>
+          <a:p>
+            <a:pPr marL="0" indent="0">
+              <a:buNone/>
+            </a:pPr>
+            <a:r>
+              <a:rPr lang="en-US" sz="950" dirty="0">
+                <a:solidFill>
+                  <a:srgbClr val="E8E6DB"/>
+                </a:solidFill>
+                <a:latin typeface="Calibri" pitchFamily="34" charset="0"/>
+                <a:ea typeface="Calibri" pitchFamily="34" charset="-122"/>
+                <a:cs typeface="Calibri" pitchFamily="34" charset="-120"/>
+              </a:rPr>
+              <a:t>Цифрові держслужбовці</a:t>
+            </a:r>
+            <a:endParaRPr lang="en-US" sz="950" dirty="0"/>
+          </a:p>
+        </p:txBody>
+      </p:sp>
+      <p:sp>
+        <p:nvSpPr>
+          <p:cNvPr id="39" name="Shape 35"/>
+          <p:cNvSpPr/>
+          <p:nvPr/>
+        </p:nvSpPr>
+        <p:spPr>
+          <a:xfrm>
+            <a:off x="5486400" y="4224528"/>
+            <a:ext cx="73152" cy="73152"/>
+          </a:xfrm>
+          <a:prstGeom prst="ellipse">
+            <a:avLst/>
+          </a:prstGeom>
+          <a:solidFill>
+            <a:srgbClr val="B08D3A"/>
+          </a:solidFill>
+          <a:ln/>
+        </p:spPr>
+      </p:sp>
+      <p:sp>
+        <p:nvSpPr>
+          <p:cNvPr id="40" name="Text 36"/>
+          <p:cNvSpPr/>
+          <p:nvPr/>
+        </p:nvSpPr>
+        <p:spPr>
+          <a:xfrm>
+            <a:off x="5669280" y="4123944"/>
+            <a:ext cx="2880360" cy="310896"/>
+          </a:xfrm>
+          <a:prstGeom prst="rect">
+            <a:avLst/>
+          </a:prstGeom>
+          <a:noFill/>
+          <a:ln/>
+        </p:spPr>
+        <p:txBody>
+          <a:bodyPr wrap="square" rtlCol="0" anchor="t"/>
+          <a:lstStyle/>
+          <a:p>
+            <a:pPr marL="0" indent="0">
+              <a:buNone/>
+            </a:pPr>
+            <a:r>
+              <a:rPr lang="en-US" sz="950" dirty="0">
+                <a:solidFill>
+                  <a:srgbClr val="E8E6DB"/>
+                </a:solidFill>
+                <a:latin typeface="Calibri" pitchFamily="34" charset="0"/>
+                <a:ea typeface="Calibri" pitchFamily="34" charset="-122"/>
+                <a:cs typeface="Calibri" pitchFamily="34" charset="-120"/>
+              </a:rPr>
+              <a:t>Цифровізація державного сектору</a:t>
+            </a:r>
+            <a:endParaRPr lang="en-US" sz="950" dirty="0"/>
+          </a:p>
+        </p:txBody>
+      </p:sp>
+      <p:sp>
+        <p:nvSpPr>
+          <p:cNvPr id="41" name="Shape 37"/>
+          <p:cNvSpPr/>
+          <p:nvPr/>
+        </p:nvSpPr>
+        <p:spPr>
+          <a:xfrm>
+            <a:off x="5486400" y="4530852"/>
+            <a:ext cx="73152" cy="73152"/>
+          </a:xfrm>
+          <a:prstGeom prst="ellipse">
+            <a:avLst/>
+          </a:prstGeom>
+          <a:solidFill>
+            <a:srgbClr val="B08D3A"/>
+          </a:solidFill>
+          <a:ln/>
+        </p:spPr>
+      </p:sp>
+      <p:sp>
+        <p:nvSpPr>
+          <p:cNvPr id="42" name="Text 38"/>
+          <p:cNvSpPr/>
+          <p:nvPr/>
+        </p:nvSpPr>
+        <p:spPr>
+          <a:xfrm>
+            <a:off x="5669280" y="4430268"/>
+            <a:ext cx="2880360" cy="310896"/>
+          </a:xfrm>
+          <a:prstGeom prst="rect">
+            <a:avLst/>
+          </a:prstGeom>
+          <a:noFill/>
+          <a:ln/>
+        </p:spPr>
+        <p:txBody>
+          <a:bodyPr wrap="square" rtlCol="0" anchor="t"/>
+          <a:lstStyle/>
+          <a:p>
+            <a:pPr marL="0" indent="0">
+              <a:buNone/>
+            </a:pPr>
+            <a:r>
+              <a:rPr lang="en-US" sz="950" dirty="0">
+                <a:solidFill>
+                  <a:srgbClr val="E8E6DB"/>
+                </a:solidFill>
+                <a:latin typeface="Calibri" pitchFamily="34" charset="0"/>
+                <a:ea typeface="Calibri" pitchFamily="34" charset="-122"/>
+                <a:cs typeface="Calibri" pitchFamily="34" charset="-120"/>
+              </a:rPr>
+              <a:t>Нові цифрові професії</a:t>
+            </a:r>
+            <a:endParaRPr lang="en-US" sz="950" dirty="0"/>
           </a:p>
         </p:txBody>
       </p:sp>
@@ -7697,84 +8739,6 @@
           </a:p>
         </p:txBody>
       </p:sp>
-      <p:sp>
-        <p:nvSpPr>
-          <p:cNvPr id="25" name="Text 17"/>
-          <p:cNvSpPr/>
-          <p:nvPr/>
-        </p:nvSpPr>
-        <p:spPr>
-          <a:xfrm>
-            <a:off x="6126480" y="3703320"/>
-            <a:ext cx="2286000" cy="292608"/>
-          </a:xfrm>
-          <a:prstGeom prst="rect">
-            <a:avLst/>
-          </a:prstGeom>
-          <a:noFill/>
-          <a:ln/>
-        </p:spPr>
-        <p:txBody>
-          <a:bodyPr wrap="square" rtlCol="0" anchor="ctr"/>
-          <a:lstStyle/>
-          <a:p>
-            <a:pPr marL="0" indent="0">
-              <a:buNone/>
-            </a:pPr>
-            <a:r>
-              <a:rPr lang="en-US" sz="1350" b="1" dirty="0">
-                <a:solidFill>
-                  <a:srgbClr val="B08D3A"/>
-                </a:solidFill>
-                <a:latin typeface="Calibri" pitchFamily="34" charset="0"/>
-                <a:ea typeface="Calibri" pitchFamily="34" charset="-122"/>
-                <a:cs typeface="Calibri" pitchFamily="34" charset="-120"/>
-              </a:rPr>
-              <a:t>Руська</a:t>
-            </a:r>
-            <a:endParaRPr lang="en-US" sz="1350" dirty="0"/>
-          </a:p>
-        </p:txBody>
-      </p:sp>
-      <p:sp>
-        <p:nvSpPr>
-          <p:cNvPr id="26" name="Text 18"/>
-          <p:cNvSpPr/>
-          <p:nvPr/>
-        </p:nvSpPr>
-        <p:spPr>
-          <a:xfrm>
-            <a:off x="6126480" y="3977640"/>
-            <a:ext cx="2286000" cy="548640"/>
-          </a:xfrm>
-          <a:prstGeom prst="rect">
-            <a:avLst/>
-          </a:prstGeom>
-          <a:noFill/>
-          <a:ln/>
-        </p:spPr>
-        <p:txBody>
-          <a:bodyPr wrap="square" rtlCol="0" anchor="t"/>
-          <a:lstStyle/>
-          <a:p>
-            <a:pPr marL="0" indent="0">
-              <a:buNone/>
-            </a:pPr>
-            <a:r>
-              <a:rPr lang="en-US" sz="1050" dirty="0">
-                <a:solidFill>
-                  <a:srgbClr val="E8E6DB"/>
-                </a:solidFill>
-                <a:latin typeface="Calibri" pitchFamily="34" charset="0"/>
-                <a:ea typeface="Calibri" pitchFamily="34" charset="-122"/>
-                <a:cs typeface="Calibri" pitchFamily="34" charset="-120"/>
-              </a:rPr>
-              <a:t>Рідна</a:t>
-            </a:r>
-            <a:endParaRPr lang="en-US" sz="1050" dirty="0"/>
-          </a:p>
-        </p:txBody>
-      </p:sp>
     </p:spTree>
   </p:cSld>
   <p:clrMapOvr>
@@ -7789,7 +8753,7 @@
     <p:bg>
       <p:bgPr>
         <a:solidFill>
-          <a:srgbClr val="2E3429"/>
+          <a:srgbClr val="FFFFFF"/>
         </a:solidFill>
         <a:effectLst/>
       </p:bgPr>
@@ -7816,8 +8780,8 @@
         </p:nvSpPr>
         <p:spPr>
           <a:xfrm>
-            <a:off x="502920" y="365760"/>
-            <a:ext cx="8229600" cy="548640"/>
+            <a:off x="502920" y="274320"/>
+            <a:ext cx="8229600" cy="502920"/>
           </a:xfrm>
           <a:prstGeom prst="rect">
             <a:avLst/>
@@ -7833,23 +8797,23 @@
               <a:buNone/>
             </a:pPr>
             <a:r>
-              <a:rPr lang="en-US" sz="3200" b="1" dirty="0">
-                <a:solidFill>
-                  <a:srgbClr val="FFFFFF"/>
-                </a:solidFill>
-                <a:latin typeface="Calibri" pitchFamily="34" charset="0"/>
-                <a:ea typeface="Calibri" pitchFamily="34" charset="-122"/>
-                <a:cs typeface="Calibri" pitchFamily="34" charset="-120"/>
-              </a:rPr>
-              <a:t>Чому я — для МОУ</a:t>
-            </a:r>
-            <a:endParaRPr lang="en-US" sz="3200" dirty="0"/>
+              <a:rPr lang="en-US" sz="3000" b="1" dirty="0">
+                <a:solidFill>
+                  <a:srgbClr val="3E4637"/>
+                </a:solidFill>
+                <a:latin typeface="Calibri" pitchFamily="34" charset="0"/>
+                <a:ea typeface="Calibri" pitchFamily="34" charset="-122"/>
+                <a:cs typeface="Calibri" pitchFamily="34" charset="-120"/>
+              </a:rPr>
+              <a:t>Портфоліо — живі продукти</a:t>
+            </a:r>
+            <a:endParaRPr lang="en-US" sz="3000" dirty="0"/>
           </a:p>
         </p:txBody>
       </p:sp>
       <p:pic>
         <p:nvPicPr>
-          <p:cNvPr id="3" name="Image 0" descr="preencoded.png"/>
+          <p:cNvPr id="3" name="Image 0" descr="/home/claude/viz/viz4_fibo.png"/>
           <p:cNvPicPr>
             <a:picLocks noChangeAspect="1"/>
           </p:cNvPicPr>
@@ -7863,8 +8827,8 @@
         </p:blipFill>
         <p:spPr>
           <a:xfrm>
-            <a:off x="640080" y="1197864"/>
-            <a:ext cx="274320" cy="274320"/>
+            <a:off x="411480" y="960120"/>
+            <a:ext cx="4114800" cy="2231136"/>
           </a:xfrm>
           <a:prstGeom prst="rect">
             <a:avLst/>
@@ -7879,8 +8843,8 @@
         </p:nvSpPr>
         <p:spPr>
           <a:xfrm>
-            <a:off x="1051560" y="1143000"/>
-            <a:ext cx="7589520" cy="502920"/>
+            <a:off x="411480" y="3246120"/>
+            <a:ext cx="4114800" cy="457200"/>
           </a:xfrm>
           <a:prstGeom prst="rect">
             <a:avLst/>
@@ -7892,42 +8856,42 @@
           <a:bodyPr wrap="square" rtlCol="0" anchor="ctr"/>
           <a:lstStyle/>
           <a:p>
-            <a:pPr marL="0" indent="0">
-              <a:buNone/>
-            </a:pPr>
-            <a:r>
-              <a:rPr lang="en-US" sz="1450" dirty="0">
-                <a:solidFill>
-                  <a:srgbClr val="E8E6DB"/>
-                </a:solidFill>
-                <a:latin typeface="Calibri" pitchFamily="34" charset="0"/>
-                <a:ea typeface="Calibri" pitchFamily="34" charset="-122"/>
-                <a:cs typeface="Calibri" pitchFamily="34" charset="-120"/>
-              </a:rPr>
-              <a:t>Чинний військовослужбовець ЗСУ, в/ч А5118 — відповідаю умовам переведення у вакансії</a:t>
-            </a:r>
-            <a:endParaRPr lang="en-US" sz="1450" dirty="0"/>
+            <a:pPr marL="0" indent="0" algn="ctr">
+              <a:buNone/>
+            </a:pPr>
+            <a:r>
+              <a:rPr lang="en-US" sz="1150" dirty="0">
+                <a:solidFill>
+                  <a:srgbClr val="6B7060"/>
+                </a:solidFill>
+                <a:latin typeface="Calibri" pitchFamily="34" charset="0"/>
+                <a:ea typeface="Calibri" pitchFamily="34" charset="-122"/>
+                <a:cs typeface="Calibri" pitchFamily="34" charset="-120"/>
+              </a:rPr>
+              <a:t>FIBO Guru · fibo.guru — 7 мов, RTL, 9+ років у продакшені</a:t>
+            </a:r>
+            <a:endParaRPr lang="en-US" sz="1150" dirty="0"/>
           </a:p>
         </p:txBody>
       </p:sp>
       <p:pic>
         <p:nvPicPr>
-          <p:cNvPr id="5" name="Image 1" descr="preencoded.png"/>
+          <p:cNvPr id="5" name="Image 1" descr="/home/claude/viz/viz5_msl.png"/>
           <p:cNvPicPr>
             <a:picLocks noChangeAspect="1"/>
           </p:cNvPicPr>
           <p:nvPr/>
         </p:nvPicPr>
         <p:blipFill>
-          <a:blip r:embed="rId3"/>
+          <a:blip r:embed="rId4"/>
           <a:stretch>
             <a:fillRect/>
           </a:stretch>
         </p:blipFill>
         <p:spPr>
           <a:xfrm>
-            <a:off x="640080" y="1764792"/>
-            <a:ext cx="274320" cy="274320"/>
+            <a:off x="4709160" y="960120"/>
+            <a:ext cx="3977640" cy="2651760"/>
           </a:xfrm>
           <a:prstGeom prst="rect">
             <a:avLst/>
@@ -7942,8 +8906,8 @@
         </p:nvSpPr>
         <p:spPr>
           <a:xfrm>
-            <a:off x="1051560" y="1709928"/>
-            <a:ext cx="7589520" cy="502920"/>
+            <a:off x="4709160" y="3657600"/>
+            <a:ext cx="3977640" cy="457200"/>
           </a:xfrm>
           <a:prstGeom prst="rect">
             <a:avLst/>
@@ -7955,58 +8919,56 @@
           <a:bodyPr wrap="square" rtlCol="0" anchor="ctr"/>
           <a:lstStyle/>
           <a:p>
-            <a:pPr marL="0" indent="0">
-              <a:buNone/>
-            </a:pPr>
-            <a:r>
-              <a:rPr lang="en-US" sz="1450" dirty="0">
-                <a:solidFill>
-                  <a:srgbClr val="E8E6DB"/>
-                </a:solidFill>
-                <a:latin typeface="Calibri" pitchFamily="34" charset="0"/>
-                <a:ea typeface="Calibri" pitchFamily="34" charset="-122"/>
-                <a:cs typeface="Calibri" pitchFamily="34" charset="-120"/>
-              </a:rPr>
-              <a:t>17 років дизайну + інженерна освіта КПІ + досвід систем оборонного сектору</a:t>
-            </a:r>
-            <a:endParaRPr lang="en-US" sz="1450" dirty="0"/>
-          </a:p>
-        </p:txBody>
-      </p:sp>
-      <p:pic>
-        <p:nvPicPr>
-          <p:cNvPr id="7" name="Image 2" descr="preencoded.png"/>
-          <p:cNvPicPr>
-            <a:picLocks noChangeAspect="1"/>
-          </p:cNvPicPr>
-          <p:nvPr/>
-        </p:nvPicPr>
-        <p:blipFill>
-          <a:blip r:embed="rId3"/>
-          <a:stretch>
-            <a:fillRect/>
-          </a:stretch>
-        </p:blipFill>
-        <p:spPr>
-          <a:xfrm>
-            <a:off x="640080" y="2331720"/>
-            <a:ext cx="274320" cy="274320"/>
-          </a:xfrm>
-          <a:prstGeom prst="rect">
-            <a:avLst/>
-          </a:prstGeom>
-        </p:spPr>
-      </p:pic>
-      <p:sp>
-        <p:nvSpPr>
-          <p:cNvPr id="8" name="Text 3"/>
-          <p:cNvSpPr/>
-          <p:nvPr/>
-        </p:nvSpPr>
-        <p:spPr>
-          <a:xfrm>
-            <a:off x="1051560" y="2276856"/>
-            <a:ext cx="7589520" cy="502920"/>
+            <a:pPr marL="0" indent="0" algn="ctr">
+              <a:buNone/>
+            </a:pPr>
+            <a:r>
+              <a:rPr lang="en-US" sz="1150" dirty="0">
+                <a:solidFill>
+                  <a:srgbClr val="6B7060"/>
+                </a:solidFill>
+                <a:latin typeface="Calibri" pitchFamily="34" charset="0"/>
+                <a:ea typeface="Calibri" pitchFamily="34" charset="-122"/>
+                <a:cs typeface="Calibri" pitchFamily="34" charset="-120"/>
+              </a:rPr>
+              <a:t>МСЛ «Супер 7» · msl.ua — 3 ігри, реальні гроші, дизайн + розробка</a:t>
+            </a:r>
+            <a:endParaRPr lang="en-US" sz="1150" dirty="0"/>
+          </a:p>
+        </p:txBody>
+      </p:sp>
+      <p:sp>
+        <p:nvSpPr>
+          <p:cNvPr id="7" name="Shape 3"/>
+          <p:cNvSpPr/>
+          <p:nvPr/>
+        </p:nvSpPr>
+        <p:spPr>
+          <a:xfrm>
+            <a:off x="411480" y="4343400"/>
+            <a:ext cx="8275320" cy="548640"/>
+          </a:xfrm>
+          <a:prstGeom prst="roundRect">
+            <a:avLst>
+              <a:gd name="adj" fmla="val 13333"/>
+            </a:avLst>
+          </a:prstGeom>
+          <a:solidFill>
+            <a:srgbClr val="EFEBDD"/>
+          </a:solidFill>
+          <a:ln/>
+        </p:spPr>
+      </p:sp>
+      <p:sp>
+        <p:nvSpPr>
+          <p:cNvPr id="8" name="Text 4"/>
+          <p:cNvSpPr/>
+          <p:nvPr/>
+        </p:nvSpPr>
+        <p:spPr>
+          <a:xfrm>
+            <a:off x="411480" y="4343400"/>
+            <a:ext cx="8275320" cy="548640"/>
           </a:xfrm>
           <a:prstGeom prst="rect">
             <a:avLst/>
@@ -8018,290 +8980,32 @@
           <a:bodyPr wrap="square" rtlCol="0" anchor="ctr"/>
           <a:lstStyle/>
           <a:p>
-            <a:pPr marL="0" indent="0">
-              <a:buNone/>
-            </a:pPr>
-            <a:r>
-              <a:rPr lang="en-US" sz="1450" dirty="0">
-                <a:solidFill>
-                  <a:srgbClr val="E8E6DB"/>
-                </a:solidFill>
-                <a:latin typeface="Calibri" pitchFamily="34" charset="0"/>
-                <a:ea typeface="Calibri" pitchFamily="34" charset="-122"/>
-                <a:cs typeface="Calibri" pitchFamily="34" charset="-120"/>
-              </a:rPr>
-              <a:t>Наказ ГШ ЗСУ №40 — військове діловодство, оформлення службових документів</a:t>
-            </a:r>
-            <a:endParaRPr lang="en-US" sz="1450" dirty="0"/>
-          </a:p>
-        </p:txBody>
-      </p:sp>
-      <p:pic>
-        <p:nvPicPr>
-          <p:cNvPr id="9" name="Image 3" descr="preencoded.png"/>
-          <p:cNvPicPr>
-            <a:picLocks noChangeAspect="1"/>
-          </p:cNvPicPr>
-          <p:nvPr/>
-        </p:nvPicPr>
-        <p:blipFill>
-          <a:blip r:embed="rId3"/>
-          <a:stretch>
-            <a:fillRect/>
-          </a:stretch>
-        </p:blipFill>
-        <p:spPr>
-          <a:xfrm>
-            <a:off x="640080" y="2898648"/>
-            <a:ext cx="274320" cy="274320"/>
-          </a:xfrm>
-          <a:prstGeom prst="rect">
-            <a:avLst/>
-          </a:prstGeom>
-        </p:spPr>
-      </p:pic>
-      <p:sp>
-        <p:nvSpPr>
-          <p:cNvPr id="10" name="Text 4"/>
-          <p:cNvSpPr/>
-          <p:nvPr/>
-        </p:nvSpPr>
-        <p:spPr>
-          <a:xfrm>
-            <a:off x="1051560" y="2843784"/>
-            <a:ext cx="7589520" cy="502920"/>
-          </a:xfrm>
-          <a:prstGeom prst="rect">
-            <a:avLst/>
-          </a:prstGeom>
-          <a:noFill/>
-          <a:ln/>
-        </p:spPr>
-        <p:txBody>
-          <a:bodyPr wrap="square" rtlCol="0" anchor="ctr"/>
-          <a:lstStyle/>
-          <a:p>
-            <a:pPr marL="0" indent="0">
-              <a:buNone/>
-            </a:pPr>
-            <a:r>
-              <a:rPr lang="en-US" sz="1450" dirty="0">
-                <a:solidFill>
-                  <a:srgbClr val="E8E6DB"/>
-                </a:solidFill>
-                <a:latin typeface="Calibri" pitchFamily="34" charset="0"/>
-                <a:ea typeface="Calibri" pitchFamily="34" charset="-122"/>
-                <a:cs typeface="Calibri" pitchFamily="34" charset="-120"/>
-              </a:rPr>
-              <a:t>Наказ ГК ЗСУ №140 — оперативні (бойові) документи, знаки НАТО: Delta та друковані карти</a:t>
-            </a:r>
-            <a:endParaRPr lang="en-US" sz="1450" dirty="0"/>
-          </a:p>
-        </p:txBody>
-      </p:sp>
-      <p:pic>
-        <p:nvPicPr>
-          <p:cNvPr id="11" name="Image 4" descr="preencoded.png"/>
-          <p:cNvPicPr>
-            <a:picLocks noChangeAspect="1"/>
-          </p:cNvPicPr>
-          <p:nvPr/>
-        </p:nvPicPr>
-        <p:blipFill>
-          <a:blip r:embed="rId3"/>
-          <a:stretch>
-            <a:fillRect/>
-          </a:stretch>
-        </p:blipFill>
-        <p:spPr>
-          <a:xfrm>
-            <a:off x="640080" y="3465576"/>
-            <a:ext cx="274320" cy="274320"/>
-          </a:xfrm>
-          <a:prstGeom prst="rect">
-            <a:avLst/>
-          </a:prstGeom>
-        </p:spPr>
-      </p:pic>
-      <p:sp>
-        <p:nvSpPr>
-          <p:cNvPr id="12" name="Text 5"/>
-          <p:cNvSpPr/>
-          <p:nvPr/>
-        </p:nvSpPr>
-        <p:spPr>
-          <a:xfrm>
-            <a:off x="1051560" y="3410712"/>
-            <a:ext cx="7589520" cy="502920"/>
-          </a:xfrm>
-          <a:prstGeom prst="rect">
-            <a:avLst/>
-          </a:prstGeom>
-          <a:noFill/>
-          <a:ln/>
-        </p:spPr>
-        <p:txBody>
-          <a:bodyPr wrap="square" rtlCol="0" anchor="ctr"/>
-          <a:lstStyle/>
-          <a:p>
-            <a:pPr marL="0" indent="0">
-              <a:buNone/>
-            </a:pPr>
-            <a:r>
-              <a:rPr lang="en-US" sz="1450" dirty="0">
-                <a:solidFill>
-                  <a:srgbClr val="E8E6DB"/>
-                </a:solidFill>
-                <a:latin typeface="Calibri" pitchFamily="34" charset="0"/>
-                <a:ea typeface="Calibri" pitchFamily="34" charset="-122"/>
-                <a:cs typeface="Calibri" pitchFamily="34" charset="-120"/>
-              </a:rPr>
-              <a:t>Швидко навчаюся, ініціативний, працюю в умовах стислих дедлайнів</a:t>
-            </a:r>
-            <a:endParaRPr lang="en-US" sz="1450" dirty="0"/>
-          </a:p>
-        </p:txBody>
-      </p:sp>
-      <p:sp>
-        <p:nvSpPr>
-          <p:cNvPr id="13" name="Shape 6"/>
-          <p:cNvSpPr/>
-          <p:nvPr/>
-        </p:nvSpPr>
-        <p:spPr>
-          <a:xfrm>
-            <a:off x="640080" y="4160520"/>
-            <a:ext cx="7863840" cy="0"/>
-          </a:xfrm>
-          <a:prstGeom prst="line">
-            <a:avLst/>
-          </a:prstGeom>
-          <a:noFill/>
-          <a:ln w="12700">
-            <a:solidFill>
-              <a:srgbClr val="B08D3A"/>
-            </a:solidFill>
-            <a:prstDash val="solid"/>
-          </a:ln>
-        </p:spPr>
-      </p:sp>
-      <p:sp>
-        <p:nvSpPr>
-          <p:cNvPr id="14" name="Text 7"/>
-          <p:cNvSpPr/>
-          <p:nvPr/>
-        </p:nvSpPr>
-        <p:spPr>
-          <a:xfrm>
-            <a:off x="640080" y="4297680"/>
-            <a:ext cx="7863840" cy="365760"/>
-          </a:xfrm>
-          <a:prstGeom prst="rect">
-            <a:avLst/>
-          </a:prstGeom>
-          <a:noFill/>
-          <a:ln/>
-        </p:spPr>
-        <p:txBody>
-          <a:bodyPr wrap="square" rtlCol="0" anchor="ctr"/>
-          <a:lstStyle/>
-          <a:p>
-            <a:r>
-              <a:rPr lang="en-US" sz="1400" b="1" dirty="0">
-                <a:solidFill>
-                  <a:srgbClr val="FFFFFF"/>
-                </a:solidFill>
-                <a:latin typeface="Calibri" pitchFamily="34" charset="0"/>
-                <a:ea typeface="Calibri" pitchFamily="34" charset="-122"/>
-                <a:cs typeface="Calibri" pitchFamily="34" charset="-120"/>
-              </a:rPr>
-              <a:t>Коломієць Роман   </a:t>
-            </a:r>
-            <a:r>
-              <a:rPr lang="en-US" sz="1200" dirty="0">
-                <a:solidFill>
-                  <a:srgbClr val="C9CDBF"/>
-                </a:solidFill>
-                <a:latin typeface="Calibri" pitchFamily="34" charset="0"/>
-                <a:ea typeface="Calibri" pitchFamily="34" charset="-122"/>
-                <a:cs typeface="Calibri" pitchFamily="34" charset="-120"/>
-              </a:rPr>
-              <a:t>098 707-74-67   ·   romankolomiets@gmail.com · </a:t>
-            </a:r>
-            <a:r>
-              <a:rPr lang="en-US" sz="1200" dirty="0">
-                <a:solidFill>
-                  <a:schemeClr val="bg1">
-                    <a:lumMod val="75000"/>
-                  </a:schemeClr>
-                </a:solidFill>
-              </a:rPr>
-              <a:t>R.Kolomiiets01@mil.ua</a:t>
-            </a:r>
-            <a:r>
-              <a:rPr lang="en-US" sz="1200" dirty="0">
-                <a:solidFill>
-                  <a:schemeClr val="bg1">
-                    <a:lumMod val="75000"/>
-                  </a:schemeClr>
-                </a:solidFill>
-                <a:latin typeface="Calibri" pitchFamily="34" charset="0"/>
-                <a:ea typeface="Calibri" pitchFamily="34" charset="-122"/>
-                <a:cs typeface="Calibri" pitchFamily="34" charset="-120"/>
-              </a:rPr>
-              <a:t>  </a:t>
-            </a:r>
-            <a:r>
-              <a:rPr lang="en-US" sz="1200" dirty="0">
-                <a:solidFill>
-                  <a:srgbClr val="C9CDBF"/>
-                </a:solidFill>
-                <a:latin typeface="Calibri" pitchFamily="34" charset="0"/>
-                <a:ea typeface="Calibri" pitchFamily="34" charset="-122"/>
-                <a:cs typeface="Calibri" pitchFamily="34" charset="-120"/>
-              </a:rPr>
-              <a:t>·   Київ</a:t>
-            </a:r>
-            <a:endParaRPr lang="en-US" sz="1200" dirty="0"/>
-          </a:p>
-        </p:txBody>
-      </p:sp>
-      <p:sp>
-        <p:nvSpPr>
-          <p:cNvPr id="15" name="Text 8"/>
-          <p:cNvSpPr/>
-          <p:nvPr/>
-        </p:nvSpPr>
-        <p:spPr>
-          <a:xfrm>
-            <a:off x="640080" y="4663440"/>
-            <a:ext cx="7863840" cy="320040"/>
-          </a:xfrm>
-          <a:prstGeom prst="rect">
-            <a:avLst/>
-          </a:prstGeom>
-          <a:noFill/>
-          <a:ln/>
-        </p:spPr>
-        <p:txBody>
-          <a:bodyPr wrap="square" rtlCol="0" anchor="ctr"/>
-          <a:lstStyle/>
-          <a:p>
-            <a:pPr marL="0" indent="0">
-              <a:buNone/>
-            </a:pPr>
-            <a:r>
-              <a:rPr lang="en-US" sz="1050" i="1" dirty="0">
-                <a:solidFill>
-                  <a:srgbClr val="8F947F"/>
-                </a:solidFill>
-                <a:latin typeface="Calibri" pitchFamily="34" charset="0"/>
-                <a:ea typeface="Calibri" pitchFamily="34" charset="-122"/>
-                <a:cs typeface="Calibri" pitchFamily="34" charset="-120"/>
-              </a:rPr>
-              <a:t>Резюме створено виключно для МОУ · вакансія Дизайнер / Дата-аналітик</a:t>
-            </a:r>
-            <a:endParaRPr lang="en-US" sz="1050" dirty="0"/>
+            <a:pPr marL="0" indent="0" algn="ctr">
+              <a:buNone/>
+            </a:pPr>
+            <a:r>
+              <a:rPr lang="en-US" sz="1300" dirty="0">
+                <a:solidFill>
+                  <a:srgbClr val="24281F"/>
+                </a:solidFill>
+                <a:latin typeface="Calibri" pitchFamily="34" charset="0"/>
+                <a:ea typeface="Calibri" pitchFamily="34" charset="-122"/>
+                <a:cs typeface="Calibri" pitchFamily="34" charset="-120"/>
+              </a:rPr>
+              <a:t>Всі кейси з інфографіками:  </a:t>
+            </a:r>
+            <a:r>
+              <a:rPr lang="en-US" sz="1350" b="1" dirty="0">
+                <a:solidFill>
+                  <a:srgbClr val="B08D3A"/>
+                </a:solidFill>
+                <a:latin typeface="Calibri" pitchFamily="34" charset="0"/>
+                <a:ea typeface="Calibri" pitchFamily="34" charset="-122"/>
+                <a:cs typeface="Calibri" pitchFamily="34" charset="-120"/>
+              </a:rPr>
+              <a:t>romankolomiets.github.io/cv/port.html</a:t>
+            </a:r>
+            <a:endParaRPr lang="en-US" sz="1300" dirty="0"/>
           </a:p>
         </p:txBody>
       </p:sp>
